--- a/documentation/plot_info.pptx
+++ b/documentation/plot_info.pptx
@@ -121,7 +121,7 @@
 <file path=ppt/revisionInfo.xml><?xml version="1.0" encoding="utf-8"?>
 <p1510:revInfo xmlns:a="http://schemas.openxmlformats.org/drawingml/2006/main" xmlns:r="http://schemas.openxmlformats.org/officeDocument/2006/relationships" xmlns:p1510="http://schemas.microsoft.com/office/powerpoint/2015/10/main">
   <p1510:revLst>
-    <p1510:client id="{627AC242-72DC-43F1-B8D1-38D35556D062}" v="12" dt="2025-07-14T22:54:27.365"/>
+    <p1510:client id="{627AC242-72DC-43F1-B8D1-38D35556D062}" v="82" dt="2025-07-14T23:17:06.011"/>
   </p1510:revLst>
 </p1510:revInfo>
 </file>
@@ -521,7 +521,7 @@
           <a:lstStyle/>
           <a:p>
             <a:r>
-              <a:rPr lang="en-CA" dirty="0"/>
+              <a:rPr lang="en-CA"/>
               <a:t>Mention in the modal box that we can see from this plot that some models show an increase in PPT whereas others show a decrease</a:t>
             </a:r>
           </a:p>
@@ -607,7 +607,7 @@
           <a:bodyPr/>
           <a:lstStyle/>
           <a:p>
-            <a:endParaRPr lang="en-CA" dirty="0"/>
+            <a:endParaRPr lang="en-CA"/>
           </a:p>
         </p:txBody>
       </p:sp>
@@ -692,7 +692,7 @@
           <a:lstStyle/>
           <a:p>
             <a:r>
-              <a:rPr lang="en-CA" dirty="0"/>
+              <a:rPr lang="en-CA"/>
               <a:t>Interpreting the diagram: Temperature trends are displayed as the red line and precipitation trends are displayed as the blue line.</a:t>
             </a:r>
           </a:p>
@@ -4029,7 +4029,7 @@
           <a:p>
             <a:pPr algn="ctr"/>
             <a:r>
-              <a:rPr lang="en-CA" dirty="0"/>
+              <a:rPr lang="en-CA"/>
               <a:t>Time Series Plot for Mackenzie FLP Area</a:t>
             </a:r>
           </a:p>
@@ -4265,8 +4265,8 @@
         </p:nvSpPr>
         <p:spPr>
           <a:xfrm>
-            <a:off x="9177866" y="1767183"/>
-            <a:ext cx="2870200" cy="3600986"/>
+            <a:off x="9185335" y="1674850"/>
+            <a:ext cx="2870200" cy="3785652"/>
           </a:xfrm>
           <a:prstGeom prst="rect">
             <a:avLst/>
@@ -4280,29 +4280,29 @@
           <a:lstStyle/>
           <a:p>
             <a:r>
-              <a:rPr lang="en-CA" sz="1200" dirty="0"/>
+              <a:rPr lang="en-CA" sz="1200"/>
               <a:t>Years axis</a:t>
             </a:r>
           </a:p>
           <a:p>
-            <a:endParaRPr lang="en-CA" sz="1200" dirty="0"/>
-          </a:p>
-          <a:p>
-            <a:r>
-              <a:rPr lang="en-CA" sz="1200" dirty="0"/>
+            <a:endParaRPr lang="en-CA" sz="1200"/>
+          </a:p>
+          <a:p>
+            <a:r>
+              <a:rPr lang="en-CA" sz="1200"/>
               <a:t>Variable of interest axis</a:t>
             </a:r>
           </a:p>
           <a:p>
-            <a:endParaRPr lang="en-CA" sz="1200" dirty="0"/>
-          </a:p>
-          <a:p>
-            <a:r>
-              <a:rPr lang="en-CA" sz="1200" dirty="0"/>
+            <a:endParaRPr lang="en-CA" sz="1200"/>
+          </a:p>
+          <a:p>
+            <a:r>
+              <a:rPr lang="en-CA" sz="1200"/>
               <a:t>Simulated historic climate data using the recommended 8-GCM ensemble, from 1901-2014 (</a:t>
             </a:r>
             <a:r>
-              <a:rPr lang="en-CA" sz="1200" b="1" dirty="0">
+              <a:rPr lang="en-CA" sz="1200" b="1">
                 <a:solidFill>
                   <a:schemeClr val="bg2">
                     <a:lumMod val="50000"/>
@@ -4312,28 +4312,28 @@
               <a:t>gray </a:t>
             </a:r>
             <a:r>
-              <a:rPr lang="en-CA" sz="1200" dirty="0"/>
+              <a:rPr lang="en-CA" sz="1200"/>
               <a:t>shading)</a:t>
             </a:r>
           </a:p>
           <a:p>
-            <a:endParaRPr lang="en-CA" sz="1200" dirty="0"/>
-          </a:p>
-          <a:p>
-            <a:r>
-              <a:rPr lang="en-CA" sz="1200" dirty="0"/>
+            <a:endParaRPr lang="en-CA" sz="1200"/>
+          </a:p>
+          <a:p>
+            <a:r>
+              <a:rPr lang="en-CA" sz="1200"/>
               <a:t>Observed historic climate data by dataset (</a:t>
             </a:r>
             <a:r>
-              <a:rPr lang="en-CA" sz="1200" b="1" dirty="0"/>
+              <a:rPr lang="en-CA" sz="1200" b="1"/>
               <a:t>black</a:t>
             </a:r>
             <a:r>
-              <a:rPr lang="en-CA" sz="1200" dirty="0"/>
+              <a:rPr lang="en-CA" sz="1200"/>
               <a:t>, </a:t>
             </a:r>
             <a:r>
-              <a:rPr lang="en-CA" sz="1200" b="1" dirty="0">
+              <a:rPr lang="en-CA" sz="1200" b="1">
                 <a:solidFill>
                   <a:srgbClr val="F50C0A"/>
                 </a:solidFill>
@@ -4341,11 +4341,11 @@
               <a:t>red </a:t>
             </a:r>
             <a:r>
-              <a:rPr lang="en-CA" sz="1200" dirty="0"/>
+              <a:rPr lang="en-CA" sz="1200"/>
               <a:t>and </a:t>
             </a:r>
             <a:r>
-              <a:rPr lang="en-CA" sz="1200" b="1" dirty="0">
+              <a:rPr lang="en-CA" sz="1200" b="1">
                 <a:solidFill>
                   <a:srgbClr val="0000FF"/>
                 </a:solidFill>
@@ -4353,20 +4353,20 @@
               <a:t>blue </a:t>
             </a:r>
             <a:r>
-              <a:rPr lang="en-CA" sz="1200" dirty="0"/>
+              <a:rPr lang="en-CA" sz="1200"/>
               <a:t>lines), from 1901-2023</a:t>
             </a:r>
           </a:p>
           <a:p>
-            <a:endParaRPr lang="en-CA" sz="1200" dirty="0"/>
-          </a:p>
-          <a:p>
-            <a:r>
-              <a:rPr lang="en-CA" sz="1200" dirty="0"/>
-              <a:t>Simulated climate data, by range of each SSP (</a:t>
-            </a:r>
-            <a:r>
-              <a:rPr lang="en-CA" sz="1200" b="1" dirty="0">
+            <a:endParaRPr lang="en-CA" sz="1200"/>
+          </a:p>
+          <a:p>
+            <a:r>
+              <a:rPr lang="en-CA" sz="1200"/>
+              <a:t>Simulated climate data showing projected change in variable of interest, by range of each SSP (</a:t>
+            </a:r>
+            <a:r>
+              <a:rPr lang="en-CA" sz="1200" b="1">
                 <a:solidFill>
                   <a:srgbClr val="5681AD"/>
                 </a:solidFill>
@@ -4374,11 +4374,11 @@
               <a:t>blue</a:t>
             </a:r>
             <a:r>
-              <a:rPr lang="en-CA" sz="1200" dirty="0"/>
+              <a:rPr lang="en-CA" sz="1200"/>
               <a:t>, </a:t>
             </a:r>
             <a:r>
-              <a:rPr lang="en-CA" sz="1200" b="1" dirty="0">
+              <a:rPr lang="en-CA" sz="1200" b="1">
                 <a:solidFill>
                   <a:srgbClr val="6FAF8B"/>
                 </a:solidFill>
@@ -4386,11 +4386,11 @@
               <a:t>green</a:t>
             </a:r>
             <a:r>
-              <a:rPr lang="en-CA" sz="1200" dirty="0"/>
+              <a:rPr lang="en-CA" sz="1200"/>
               <a:t>, and </a:t>
             </a:r>
             <a:r>
-              <a:rPr lang="en-CA" sz="1200" b="1" dirty="0">
+              <a:rPr lang="en-CA" sz="1200" b="1">
                 <a:solidFill>
                   <a:srgbClr val="DC954F"/>
                 </a:solidFill>
@@ -4398,20 +4398,20 @@
               <a:t>orange </a:t>
             </a:r>
             <a:r>
-              <a:rPr lang="en-CA" sz="1200" dirty="0"/>
+              <a:rPr lang="en-CA" sz="1200"/>
               <a:t>shading), from 2015-2100</a:t>
             </a:r>
           </a:p>
           <a:p>
-            <a:endParaRPr lang="en-CA" sz="1200" dirty="0"/>
-          </a:p>
-          <a:p>
-            <a:r>
-              <a:rPr lang="en-CA" sz="1200" dirty="0"/>
-              <a:t>Projected change in variable of interest by SSP (</a:t>
-            </a:r>
-            <a:r>
-              <a:rPr lang="en-CA" sz="1200" b="1" dirty="0">
+            <a:endParaRPr lang="en-CA" sz="1200"/>
+          </a:p>
+          <a:p>
+            <a:r>
+              <a:rPr lang="en-CA" sz="1200"/>
+              <a:t>Mean projected change in variable of interest by SSP (</a:t>
+            </a:r>
+            <a:r>
+              <a:rPr lang="en-CA" sz="1200" b="1">
                 <a:solidFill>
                   <a:srgbClr val="5681AD"/>
                 </a:solidFill>
@@ -4419,11 +4419,11 @@
               <a:t>blue</a:t>
             </a:r>
             <a:r>
-              <a:rPr lang="en-CA" sz="1200" dirty="0"/>
+              <a:rPr lang="en-CA" sz="1200"/>
               <a:t>, </a:t>
             </a:r>
             <a:r>
-              <a:rPr lang="en-CA" sz="1200" b="1" dirty="0">
+              <a:rPr lang="en-CA" sz="1200" b="1">
                 <a:solidFill>
                   <a:srgbClr val="6FAF8B"/>
                 </a:solidFill>
@@ -4431,11 +4431,11 @@
               <a:t>green</a:t>
             </a:r>
             <a:r>
-              <a:rPr lang="en-CA" sz="1200" dirty="0"/>
+              <a:rPr lang="en-CA" sz="1200"/>
               <a:t>, and </a:t>
             </a:r>
             <a:r>
-              <a:rPr lang="en-CA" sz="1200" b="1" dirty="0">
+              <a:rPr lang="en-CA" sz="1200" b="1">
                 <a:solidFill>
                   <a:srgbClr val="DC954F"/>
                 </a:solidFill>
@@ -4443,7 +4443,7 @@
               <a:t>orange </a:t>
             </a:r>
             <a:r>
-              <a:rPr lang="en-CA" sz="1200" dirty="0"/>
+              <a:rPr lang="en-CA" sz="1200"/>
               <a:t>lines), from 2015-2100</a:t>
             </a:r>
           </a:p>
@@ -4477,7 +4477,7 @@
         </p:blipFill>
         <p:spPr>
           <a:xfrm>
-            <a:off x="8779932" y="1717705"/>
+            <a:off x="8779930" y="1622898"/>
             <a:ext cx="397933" cy="397933"/>
           </a:xfrm>
           <a:prstGeom prst="rect">
@@ -4513,7 +4513,7 @@
         </p:blipFill>
         <p:spPr>
           <a:xfrm>
-            <a:off x="8779931" y="2105053"/>
+            <a:off x="8787402" y="1998423"/>
             <a:ext cx="397933" cy="397933"/>
           </a:xfrm>
           <a:prstGeom prst="rect">
@@ -4549,7 +4549,7 @@
         </p:blipFill>
         <p:spPr>
           <a:xfrm>
-            <a:off x="8779930" y="2502986"/>
+            <a:off x="8787402" y="2394913"/>
             <a:ext cx="397933" cy="397933"/>
           </a:xfrm>
           <a:prstGeom prst="rect">
@@ -4585,7 +4585,7 @@
         </p:blipFill>
         <p:spPr>
           <a:xfrm>
-            <a:off x="8779930" y="3234932"/>
+            <a:off x="8787402" y="3130550"/>
             <a:ext cx="397933" cy="397933"/>
           </a:xfrm>
           <a:prstGeom prst="rect">
@@ -4621,7 +4621,7 @@
         </p:blipFill>
         <p:spPr>
           <a:xfrm>
-            <a:off x="8779930" y="3966878"/>
+            <a:off x="8787402" y="3866188"/>
             <a:ext cx="397933" cy="397933"/>
           </a:xfrm>
           <a:prstGeom prst="rect">
@@ -4657,7 +4657,7 @@
         </p:blipFill>
         <p:spPr>
           <a:xfrm>
-            <a:off x="8787402" y="4667523"/>
+            <a:off x="8787402" y="4785217"/>
             <a:ext cx="397933" cy="397933"/>
           </a:xfrm>
           <a:prstGeom prst="rect">
@@ -4725,7 +4725,7 @@
           <a:p>
             <a:pPr algn="ctr"/>
             <a:r>
-              <a:rPr lang="en-CA" dirty="0"/>
+              <a:rPr lang="en-CA"/>
               <a:t>Bivariate Plot for 100 Mile House FLP Area; 2041-2060</a:t>
             </a:r>
           </a:p>
@@ -4898,25 +4898,25 @@
           <a:lstStyle/>
           <a:p>
             <a:r>
-              <a:rPr lang="en-CA" sz="1200" dirty="0"/>
+              <a:rPr lang="en-CA" sz="1200"/>
               <a:t>Trajectory line for a specific GCM, the coloured circles along the line shows the ensemble mean for that GCM in 20-year increments</a:t>
             </a:r>
           </a:p>
           <a:p>
-            <a:endParaRPr lang="en-CA" sz="1200" dirty="0"/>
-          </a:p>
-          <a:p>
-            <a:r>
-              <a:rPr lang="en-CA" sz="1200" dirty="0"/>
+            <a:endParaRPr lang="en-CA" sz="1200"/>
+          </a:p>
+          <a:p>
+            <a:r>
+              <a:rPr lang="en-CA" sz="1200"/>
               <a:t>Smaller circles around the trajectory are the individual model runs for a specific (will be the same colour as the trajectory line)</a:t>
             </a:r>
           </a:p>
           <a:p>
-            <a:endParaRPr lang="en-CA" sz="1200" dirty="0"/>
-          </a:p>
-          <a:p>
-            <a:r>
-              <a:rPr lang="en-CA" sz="1200" dirty="0"/>
+            <a:endParaRPr lang="en-CA" sz="1200"/>
+          </a:p>
+          <a:p>
+            <a:r>
+              <a:rPr lang="en-CA" sz="1200"/>
               <a:t>Large circle with model name on the trajectory line shows the ensemble mean for that specific GCM in the period plotted (here, it is the ensemble mean for 2041-2060)</a:t>
             </a:r>
           </a:p>
@@ -5120,7 +5120,7 @@
           <a:p>
             <a:pPr algn="ctr"/>
             <a:r>
-              <a:rPr lang="en-CA" dirty="0"/>
+              <a:rPr lang="en-CA"/>
               <a:t>Bulkley-Morice FLP Area; 1961-1990</a:t>
             </a:r>
           </a:p>
@@ -5443,16 +5443,16 @@
           <a:lstStyle/>
           <a:p>
             <a:r>
-              <a:rPr lang="en-CA" sz="1200" dirty="0"/>
+              <a:rPr lang="en-CA" sz="1200"/>
               <a:t>Average annual temperature &amp; precipitation</a:t>
             </a:r>
           </a:p>
           <a:p>
-            <a:endParaRPr lang="en-CA" sz="1200" dirty="0"/>
-          </a:p>
-          <a:p>
-            <a:r>
-              <a:rPr lang="en-CA" sz="1200" dirty="0"/>
+            <a:endParaRPr lang="en-CA" sz="1200"/>
+          </a:p>
+          <a:p>
+            <a:r>
+              <a:rPr lang="en-CA" sz="1200"/>
               <a:t>Temperature axis</a:t>
             </a:r>
           </a:p>
@@ -5461,11 +5461,11 @@
               <a:buFontTx/>
               <a:buChar char="-"/>
             </a:pPr>
-            <a:endParaRPr lang="en-CA" sz="1200" dirty="0"/>
-          </a:p>
-          <a:p>
-            <a:r>
-              <a:rPr lang="en-CA" sz="1200" dirty="0"/>
+            <a:endParaRPr lang="en-CA" sz="1200"/>
+          </a:p>
+          <a:p>
+            <a:r>
+              <a:rPr lang="en-CA" sz="1200"/>
               <a:t>Precipitation axis</a:t>
             </a:r>
           </a:p>
@@ -5474,11 +5474,11 @@
               <a:buFontTx/>
               <a:buChar char="-"/>
             </a:pPr>
-            <a:endParaRPr lang="en-CA" sz="1200" dirty="0"/>
-          </a:p>
-          <a:p>
-            <a:r>
-              <a:rPr lang="en-CA" sz="1200" dirty="0"/>
+            <a:endParaRPr lang="en-CA" sz="1200"/>
+          </a:p>
+          <a:p>
+            <a:r>
+              <a:rPr lang="en-CA" sz="1200"/>
               <a:t>Months of the year</a:t>
             </a:r>
           </a:p>
@@ -5487,15 +5487,15 @@
               <a:buFontTx/>
               <a:buChar char="-"/>
             </a:pPr>
-            <a:endParaRPr lang="en-CA" sz="1200" dirty="0"/>
-          </a:p>
-          <a:p>
-            <a:r>
-              <a:rPr lang="en-CA" sz="1200" dirty="0"/>
+            <a:endParaRPr lang="en-CA" sz="1200"/>
+          </a:p>
+          <a:p>
+            <a:r>
+              <a:rPr lang="en-CA" sz="1200"/>
               <a:t>Months with frost likely (</a:t>
             </a:r>
             <a:r>
-              <a:rPr lang="en-CA" sz="1200" b="1" dirty="0">
+              <a:rPr lang="en-CA" sz="1200" b="1">
                 <a:solidFill>
                   <a:srgbClr val="4C4CFF"/>
                 </a:solidFill>
@@ -5503,7 +5503,7 @@
               <a:t>blue </a:t>
             </a:r>
             <a:r>
-              <a:rPr lang="en-CA" sz="1200" dirty="0"/>
+              <a:rPr lang="en-CA" sz="1200"/>
               <a:t>bars)</a:t>
             </a:r>
           </a:p>
@@ -5512,59 +5512,59 @@
               <a:buFontTx/>
               <a:buChar char="-"/>
             </a:pPr>
-            <a:endParaRPr lang="en-CA" sz="1200" dirty="0"/>
-          </a:p>
-          <a:p>
-            <a:r>
-              <a:rPr lang="en-CA" sz="1200" dirty="0"/>
+            <a:endParaRPr lang="en-CA" sz="1200"/>
+          </a:p>
+          <a:p>
+            <a:r>
+              <a:rPr lang="en-CA" sz="1200"/>
               <a:t>Average monthly </a:t>
             </a:r>
             <a:r>
-              <a:rPr lang="en-CA" sz="1200" b="1" dirty="0">
+              <a:rPr lang="en-CA" sz="1200" b="1">
                 <a:solidFill>
                   <a:srgbClr val="D90A27"/>
                 </a:solidFill>
               </a:rPr>
               <a:t>temperature curve</a:t>
             </a:r>
-            <a:endParaRPr lang="en-CA" sz="1200" dirty="0"/>
+            <a:endParaRPr lang="en-CA" sz="1200"/>
           </a:p>
           <a:p>
             <a:pPr marL="171450" indent="-171450">
               <a:buFontTx/>
               <a:buChar char="-"/>
             </a:pPr>
-            <a:endParaRPr lang="en-CA" sz="1200" dirty="0"/>
-          </a:p>
-          <a:p>
-            <a:r>
-              <a:rPr lang="en-CA" sz="1200" dirty="0"/>
+            <a:endParaRPr lang="en-CA" sz="1200"/>
+          </a:p>
+          <a:p>
+            <a:r>
+              <a:rPr lang="en-CA" sz="1200"/>
               <a:t>Average monthly </a:t>
             </a:r>
             <a:r>
-              <a:rPr lang="en-CA" sz="1200" b="1" dirty="0">
+              <a:rPr lang="en-CA" sz="1200" b="1">
                 <a:solidFill>
                   <a:srgbClr val="6B6BFF"/>
                 </a:solidFill>
               </a:rPr>
               <a:t>precipitation curve</a:t>
             </a:r>
-            <a:endParaRPr lang="en-CA" sz="1200" dirty="0"/>
+            <a:endParaRPr lang="en-CA" sz="1200"/>
           </a:p>
           <a:p>
             <a:pPr marL="171450" indent="-171450">
               <a:buFontTx/>
               <a:buChar char="-"/>
             </a:pPr>
-            <a:endParaRPr lang="en-CA" sz="1200" dirty="0"/>
-          </a:p>
-          <a:p>
-            <a:r>
-              <a:rPr lang="en-CA" sz="1200" dirty="0"/>
+            <a:endParaRPr lang="en-CA" sz="1200"/>
+          </a:p>
+          <a:p>
+            <a:r>
+              <a:rPr lang="en-CA" sz="1200"/>
               <a:t>Diurnal range (difference between the highest and lowest temperature recorded in a 24-hr period – </a:t>
             </a:r>
             <a:r>
-              <a:rPr lang="en-CA" sz="1200" b="1" dirty="0">
+              <a:rPr lang="en-CA" sz="1200" b="1">
                 <a:solidFill>
                   <a:srgbClr val="F50C0A"/>
                 </a:solidFill>
@@ -5572,7 +5572,7 @@
               <a:t>red</a:t>
             </a:r>
             <a:r>
-              <a:rPr lang="en-CA" sz="1200" b="1" dirty="0">
+              <a:rPr lang="en-CA" sz="1200" b="1">
                 <a:solidFill>
                   <a:srgbClr val="CC99CC"/>
                 </a:solidFill>
@@ -5580,7 +5580,7 @@
               <a:t> </a:t>
             </a:r>
             <a:r>
-              <a:rPr lang="en-CA" sz="1200" dirty="0"/>
+              <a:rPr lang="en-CA" sz="1200"/>
               <a:t>shading)</a:t>
             </a:r>
           </a:p>
@@ -5589,7 +5589,7 @@
               <a:buFontTx/>
               <a:buChar char="-"/>
             </a:pPr>
-            <a:endParaRPr lang="en-CA" sz="1200" dirty="0"/>
+            <a:endParaRPr lang="en-CA" sz="1200"/>
           </a:p>
         </p:txBody>
       </p:sp>
@@ -5971,7 +5971,7 @@
           <a:p>
             <a:pPr algn="ctr"/>
             <a:r>
-              <a:rPr lang="en-CA" dirty="0"/>
+              <a:rPr lang="en-CA"/>
               <a:t>Coast Range Ecoregion; 1961-1990</a:t>
             </a:r>
           </a:p>
@@ -6006,17 +6006,17 @@
           <a:lstStyle/>
           <a:p>
             <a:r>
-              <a:rPr lang="en-CA" b="1" u="sng" dirty="0"/>
+              <a:rPr lang="en-CA" b="1" u="sng"/>
               <a:t>Humid period:</a:t>
             </a:r>
           </a:p>
           <a:p>
             <a:r>
-              <a:rPr lang="en-CA" sz="1200" dirty="0"/>
+              <a:rPr lang="en-CA" sz="1200"/>
               <a:t>When the </a:t>
             </a:r>
             <a:r>
-              <a:rPr lang="en-CA" sz="1200" b="1" dirty="0">
+              <a:rPr lang="en-CA" sz="1200" b="1">
                 <a:solidFill>
                   <a:srgbClr val="6B6BFF"/>
                 </a:solidFill>
@@ -6024,11 +6024,11 @@
               <a:t>blue line </a:t>
             </a:r>
             <a:r>
-              <a:rPr lang="en-CA" sz="1200" dirty="0"/>
+              <a:rPr lang="en-CA" sz="1200"/>
               <a:t>is above the </a:t>
             </a:r>
             <a:r>
-              <a:rPr lang="en-CA" sz="1200" b="1" dirty="0">
+              <a:rPr lang="en-CA" sz="1200" b="1">
                 <a:solidFill>
                   <a:srgbClr val="D90A27"/>
                 </a:solidFill>
@@ -6036,14 +6036,14 @@
               <a:t>red line</a:t>
             </a:r>
             <a:r>
-              <a:rPr lang="en-CA" sz="1200" dirty="0"/>
+              <a:rPr lang="en-CA" sz="1200"/>
               <a:t>, conditions are </a:t>
             </a:r>
             <a:r>
-              <a:rPr lang="en-CA" sz="1200" b="1" dirty="0"/>
+              <a:rPr lang="en-CA" sz="1200" b="1"/>
               <a:t>humid</a:t>
             </a:r>
-            <a:endParaRPr lang="en-CA" sz="1200" dirty="0"/>
+            <a:endParaRPr lang="en-CA" sz="1200"/>
           </a:p>
         </p:txBody>
       </p:sp>
@@ -6148,17 +6148,17 @@
           <a:lstStyle/>
           <a:p>
             <a:r>
-              <a:rPr lang="en-CA" b="1" u="sng" dirty="0"/>
+              <a:rPr lang="en-CA" b="1" u="sng"/>
               <a:t>Wet period:</a:t>
             </a:r>
           </a:p>
           <a:p>
             <a:r>
-              <a:rPr lang="en-CA" sz="1200" dirty="0"/>
+              <a:rPr lang="en-CA" sz="1200"/>
               <a:t>When the </a:t>
             </a:r>
             <a:r>
-              <a:rPr lang="en-CA" sz="1200" b="1" dirty="0">
+              <a:rPr lang="en-CA" sz="1200" b="1">
                 <a:solidFill>
                   <a:srgbClr val="6B6BFF"/>
                 </a:solidFill>
@@ -6166,14 +6166,14 @@
               <a:t>blue line </a:t>
             </a:r>
             <a:r>
-              <a:rPr lang="en-CA" sz="1200" dirty="0"/>
+              <a:rPr lang="en-CA" sz="1200"/>
               <a:t>is above 100m, conditions are </a:t>
             </a:r>
             <a:r>
-              <a:rPr lang="en-CA" sz="1200" b="1" dirty="0"/>
+              <a:rPr lang="en-CA" sz="1200" b="1"/>
               <a:t>wet</a:t>
             </a:r>
-            <a:endParaRPr lang="en-CA" sz="1200" dirty="0"/>
+            <a:endParaRPr lang="en-CA" sz="1200"/>
           </a:p>
         </p:txBody>
       </p:sp>
@@ -6242,17 +6242,17 @@
           <a:lstStyle/>
           <a:p>
             <a:r>
-              <a:rPr lang="en-CA" b="1" u="sng" dirty="0"/>
+              <a:rPr lang="en-CA" b="1" u="sng"/>
               <a:t>Dry period:</a:t>
             </a:r>
           </a:p>
           <a:p>
             <a:r>
-              <a:rPr lang="en-CA" sz="1200" dirty="0"/>
+              <a:rPr lang="en-CA" sz="1200"/>
               <a:t>When the </a:t>
             </a:r>
             <a:r>
-              <a:rPr lang="en-CA" sz="1200" b="1" dirty="0">
+              <a:rPr lang="en-CA" sz="1200" b="1">
                 <a:solidFill>
                   <a:srgbClr val="D90A27"/>
                 </a:solidFill>
@@ -6260,11 +6260,11 @@
               <a:t>red line </a:t>
             </a:r>
             <a:r>
-              <a:rPr lang="en-CA" sz="1200" dirty="0"/>
+              <a:rPr lang="en-CA" sz="1200"/>
               <a:t>is above the </a:t>
             </a:r>
             <a:r>
-              <a:rPr lang="en-CA" sz="1200" b="1" dirty="0">
+              <a:rPr lang="en-CA" sz="1200" b="1">
                 <a:solidFill>
                   <a:srgbClr val="6B6BFF"/>
                 </a:solidFill>
@@ -6272,14 +6272,14 @@
               <a:t>blue line</a:t>
             </a:r>
             <a:r>
-              <a:rPr lang="en-CA" sz="1200" dirty="0"/>
+              <a:rPr lang="en-CA" sz="1200"/>
               <a:t>, conditions are </a:t>
             </a:r>
             <a:r>
-              <a:rPr lang="en-CA" sz="1200" b="1" dirty="0"/>
+              <a:rPr lang="en-CA" sz="1200" b="1"/>
               <a:t>dry</a:t>
             </a:r>
-            <a:endParaRPr lang="en-CA" sz="1200" dirty="0"/>
+            <a:endParaRPr lang="en-CA" sz="1200"/>
           </a:p>
         </p:txBody>
       </p:sp>

--- a/documentation/plot_info.pptx
+++ b/documentation/plot_info.pptx
@@ -521,9 +521,104 @@
           <a:lstStyle/>
           <a:p>
             <a:r>
-              <a:rPr lang="en-CA" dirty="0"/>
-              <a:t>Mention in the modal box that we can see from this plot that some models show an increase in PPT whereas others show a decrease</a:t>
-            </a:r>
+              <a:rPr lang="en-US" sz="1200" b="0" i="0" kern="1200" dirty="0">
+                <a:solidFill>
+                  <a:schemeClr val="tx1"/>
+                </a:solidFill>
+                <a:effectLst/>
+                <a:latin typeface="+mn-lt"/>
+                <a:ea typeface="+mn-ea"/>
+                <a:cs typeface="+mn-cs"/>
+              </a:rPr>
+              <a:t>Time series plots of 20th and 21st century climate change for user-selected locations and climate variables.</a:t>
+            </a:r>
+          </a:p>
+          <a:p>
+            <a:r>
+              <a:rPr lang="en-US" sz="1200" b="0" i="0" kern="1200" dirty="0">
+                <a:solidFill>
+                  <a:schemeClr val="tx1"/>
+                </a:solidFill>
+                <a:effectLst/>
+                <a:latin typeface="+mn-lt"/>
+                <a:ea typeface="+mn-ea"/>
+                <a:cs typeface="+mn-cs"/>
+              </a:rPr>
+              <a:t>Purposes of the plot:</a:t>
+            </a:r>
+          </a:p>
+          <a:p>
+            <a:r>
+              <a:rPr lang="en-US" sz="1200" b="0" i="0" kern="1200" dirty="0">
+                <a:solidFill>
+                  <a:schemeClr val="tx1"/>
+                </a:solidFill>
+                <a:effectLst/>
+                <a:latin typeface="+mn-lt"/>
+                <a:ea typeface="+mn-ea"/>
+                <a:cs typeface="+mn-cs"/>
+              </a:rPr>
+              <a:t>View differences in interannual variability and climate change trends among global climate models (GCMs)</a:t>
+            </a:r>
+          </a:p>
+          <a:p>
+            <a:r>
+              <a:rPr lang="en-US" sz="1200" b="0" i="0" kern="1200" dirty="0">
+                <a:solidFill>
+                  <a:schemeClr val="tx1"/>
+                </a:solidFill>
+                <a:effectLst/>
+                <a:latin typeface="+mn-lt"/>
+                <a:ea typeface="+mn-ea"/>
+                <a:cs typeface="+mn-cs"/>
+              </a:rPr>
+              <a:t>View the differences between multiple simulations of each model</a:t>
+            </a:r>
+          </a:p>
+          <a:p>
+            <a:r>
+              <a:rPr lang="en-US" sz="1200" b="0" i="0" kern="1200" dirty="0">
+                <a:solidFill>
+                  <a:schemeClr val="tx1"/>
+                </a:solidFill>
+                <a:effectLst/>
+                <a:latin typeface="+mn-lt"/>
+                <a:ea typeface="+mn-ea"/>
+                <a:cs typeface="+mn-cs"/>
+              </a:rPr>
+              <a:t>Compare simulated and observed climate change from 1901 to present</a:t>
+            </a:r>
+          </a:p>
+          <a:p>
+            <a:r>
+              <a:rPr lang="en-US" sz="1200" b="0" i="0" kern="1200" dirty="0">
+                <a:solidFill>
+                  <a:schemeClr val="tx1"/>
+                </a:solidFill>
+                <a:effectLst/>
+                <a:latin typeface="+mn-lt"/>
+                <a:ea typeface="+mn-ea"/>
+                <a:cs typeface="+mn-cs"/>
+              </a:rPr>
+              <a:t>Compare time series of two different variables</a:t>
+            </a:r>
+          </a:p>
+          <a:p>
+            <a:r>
+              <a:rPr lang="en-US" sz="1200" b="0" i="0" kern="1200">
+                <a:solidFill>
+                  <a:schemeClr val="tx1"/>
+                </a:solidFill>
+                <a:effectLst/>
+                <a:latin typeface="+mn-lt"/>
+                <a:ea typeface="+mn-ea"/>
+                <a:cs typeface="+mn-cs"/>
+              </a:rPr>
+              <a:t>All global climate model anomalies are bias-corrected to the 1961-1990 reference period normals.</a:t>
+            </a:r>
+          </a:p>
+          <a:p>
+            <a:endParaRPr lang="en-US"/>
           </a:p>
         </p:txBody>
       </p:sp>
@@ -544,7 +639,7 @@
           <a:p>
             <a:fld id="{17D51559-7ED9-4495-A3C0-DDB2E926809E}" type="slidenum">
               <a:rPr lang="en-CA" smtClean="0"/>
-              <a:t>2</a:t>
+              <a:t>1</a:t>
             </a:fld>
             <a:endParaRPr lang="en-CA"/>
           </a:p>
@@ -553,7 +648,7 @@
     </p:spTree>
     <p:extLst>
       <p:ext uri="{BB962C8B-B14F-4D97-AF65-F5344CB8AC3E}">
-        <p14:creationId xmlns:p14="http://schemas.microsoft.com/office/powerpoint/2010/main" val="1038588260"/>
+        <p14:creationId xmlns:p14="http://schemas.microsoft.com/office/powerpoint/2010/main" val="484972948"/>
       </p:ext>
     </p:extLst>
   </p:cSld>
@@ -607,7 +702,285 @@
           <a:bodyPr/>
           <a:lstStyle/>
           <a:p>
-            <a:endParaRPr lang="en-CA" dirty="0"/>
+            <a:r>
+              <a:rPr lang="en-US" sz="1200" b="0" i="0" kern="1200" dirty="0">
+                <a:solidFill>
+                  <a:schemeClr val="tx1"/>
+                </a:solidFill>
+                <a:effectLst/>
+                <a:latin typeface="+mn-lt"/>
+                <a:ea typeface="+mn-ea"/>
+                <a:cs typeface="+mn-cs"/>
+              </a:rPr>
+              <a:t>Bivariate climate change plot</a:t>
+            </a:r>
+          </a:p>
+          <a:p>
+            <a:endParaRPr lang="en-US" sz="1200" b="0" i="0" kern="1200" dirty="0">
+              <a:solidFill>
+                <a:schemeClr val="tx1"/>
+              </a:solidFill>
+              <a:effectLst/>
+              <a:latin typeface="+mn-lt"/>
+              <a:ea typeface="+mn-ea"/>
+              <a:cs typeface="+mn-cs"/>
+            </a:endParaRPr>
+          </a:p>
+          <a:p>
+            <a:r>
+              <a:rPr lang="en-US" sz="1200" b="0" i="0" kern="1200" dirty="0">
+                <a:solidFill>
+                  <a:schemeClr val="tx1"/>
+                </a:solidFill>
+                <a:effectLst/>
+                <a:latin typeface="+mn-lt"/>
+                <a:ea typeface="+mn-ea"/>
+                <a:cs typeface="+mn-cs"/>
+              </a:rPr>
+              <a:t>The bivariate plots show projections of 21st century climate change for user-selected climate variables. The main purposes of the plot are to:</a:t>
+            </a:r>
+          </a:p>
+          <a:p>
+            <a:r>
+              <a:rPr lang="en-US" sz="1200" b="0" i="0" kern="1200" dirty="0">
+                <a:solidFill>
+                  <a:schemeClr val="tx1"/>
+                </a:solidFill>
+                <a:effectLst/>
+                <a:latin typeface="+mn-lt"/>
+                <a:ea typeface="+mn-ea"/>
+                <a:cs typeface="+mn-cs"/>
+              </a:rPr>
+              <a:t>- Show differences in climate change trends among global climate models (GCMs); </a:t>
+            </a:r>
+          </a:p>
+          <a:p>
+            <a:r>
+              <a:rPr lang="en-US" sz="1200" b="0" i="0" kern="1200" dirty="0">
+                <a:solidFill>
+                  <a:schemeClr val="tx1"/>
+                </a:solidFill>
+                <a:effectLst/>
+                <a:latin typeface="+mn-lt"/>
+                <a:ea typeface="+mn-ea"/>
+                <a:cs typeface="+mn-cs"/>
+              </a:rPr>
+              <a:t>- Show the differences between multiple simulations of each model; and </a:t>
+            </a:r>
+          </a:p>
+          <a:p>
+            <a:pPr marL="0" indent="0">
+              <a:buFontTx/>
+              <a:buNone/>
+            </a:pPr>
+            <a:r>
+              <a:rPr lang="en-US" sz="1200" b="0" i="0" kern="1200" dirty="0">
+                <a:solidFill>
+                  <a:schemeClr val="tx1"/>
+                </a:solidFill>
+                <a:effectLst/>
+                <a:latin typeface="+mn-lt"/>
+                <a:ea typeface="+mn-ea"/>
+                <a:cs typeface="+mn-cs"/>
+              </a:rPr>
+              <a:t>- Compare simulated climate change to observed climate change in the 2001-2020 period. </a:t>
+            </a:r>
+          </a:p>
+          <a:p>
+            <a:r>
+              <a:rPr lang="en-US" sz="1200" b="0" i="0" kern="1200" dirty="0">
+                <a:solidFill>
+                  <a:schemeClr val="tx1"/>
+                </a:solidFill>
+                <a:effectLst/>
+                <a:latin typeface="+mn-lt"/>
+                <a:ea typeface="+mn-ea"/>
+                <a:cs typeface="+mn-cs"/>
+              </a:rPr>
+              <a:t>All climate changes are relative to the 1961-1990 reference period normals.</a:t>
+            </a:r>
+          </a:p>
+          <a:p>
+            <a:endParaRPr lang="en-US" sz="1200" b="0" i="0" kern="1200" dirty="0">
+              <a:solidFill>
+                <a:schemeClr val="tx1"/>
+              </a:solidFill>
+              <a:effectLst/>
+              <a:latin typeface="+mn-lt"/>
+              <a:ea typeface="+mn-ea"/>
+              <a:cs typeface="+mn-cs"/>
+            </a:endParaRPr>
+          </a:p>
+          <a:p>
+            <a:r>
+              <a:rPr lang="en-US" sz="1200" b="0" i="0" kern="1200" dirty="0">
+                <a:solidFill>
+                  <a:schemeClr val="tx1"/>
+                </a:solidFill>
+                <a:effectLst/>
+                <a:latin typeface="+mn-lt"/>
+                <a:ea typeface="+mn-ea"/>
+                <a:cs typeface="+mn-cs"/>
+              </a:rPr>
+              <a:t>We recommend using temperature variables as the x-axis. This provides a representation of how the y-axis variable is projected to change in proportion to regional climate heating. </a:t>
+            </a:r>
+          </a:p>
+          <a:p>
+            <a:endParaRPr lang="en-US" sz="1200" b="0" i="0" kern="1200" dirty="0">
+              <a:solidFill>
+                <a:schemeClr val="tx1"/>
+              </a:solidFill>
+              <a:effectLst/>
+              <a:latin typeface="+mn-lt"/>
+              <a:ea typeface="+mn-ea"/>
+              <a:cs typeface="+mn-cs"/>
+            </a:endParaRPr>
+          </a:p>
+          <a:p>
+            <a:r>
+              <a:rPr lang="en-US" sz="1200" b="0" i="0" kern="1200" dirty="0">
+                <a:solidFill>
+                  <a:schemeClr val="tx1"/>
+                </a:solidFill>
+                <a:effectLst/>
+                <a:latin typeface="+mn-lt"/>
+                <a:ea typeface="+mn-ea"/>
+                <a:cs typeface="+mn-cs"/>
+              </a:rPr>
+              <a:t>Details</a:t>
+            </a:r>
+          </a:p>
+          <a:p>
+            <a:pPr marL="0" marR="0" lvl="0" indent="0" algn="l" defTabSz="914400" rtl="0" eaLnBrk="1" fontAlgn="auto" latinLnBrk="0" hangingPunct="1">
+              <a:lnSpc>
+                <a:spcPct val="100000"/>
+              </a:lnSpc>
+              <a:spcBef>
+                <a:spcPts val="0"/>
+              </a:spcBef>
+              <a:spcAft>
+                <a:spcPts val="0"/>
+              </a:spcAft>
+              <a:buClrTx/>
+              <a:buSzTx/>
+              <a:buFontTx/>
+              <a:buNone/>
+              <a:tabLst/>
+              <a:defRPr/>
+            </a:pPr>
+            <a:r>
+              <a:rPr lang="en-US" sz="1200" b="0" i="0" kern="1200" dirty="0">
+                <a:solidFill>
+                  <a:schemeClr val="tx1"/>
+                </a:solidFill>
+                <a:effectLst/>
+                <a:latin typeface="+mn-lt"/>
+                <a:ea typeface="+mn-ea"/>
+                <a:cs typeface="+mn-cs"/>
+              </a:rPr>
+              <a:t>- All climate changes are relative to the mean climate of the 1961-1990 period. </a:t>
+            </a:r>
+          </a:p>
+          <a:p>
+            <a:pPr marL="171450" marR="0" lvl="0" indent="-171450" algn="l" defTabSz="914400" rtl="0" eaLnBrk="1" fontAlgn="auto" latinLnBrk="0" hangingPunct="1">
+              <a:lnSpc>
+                <a:spcPct val="100000"/>
+              </a:lnSpc>
+              <a:spcBef>
+                <a:spcPts val="0"/>
+              </a:spcBef>
+              <a:spcAft>
+                <a:spcPts val="0"/>
+              </a:spcAft>
+              <a:buClrTx/>
+              <a:buSzTx/>
+              <a:buFontTx/>
+              <a:buChar char="-"/>
+              <a:tabLst/>
+              <a:defRPr/>
+            </a:pPr>
+            <a:r>
+              <a:rPr lang="en-US" sz="1200" b="0" i="0" kern="1200" dirty="0">
+                <a:solidFill>
+                  <a:schemeClr val="tx1"/>
+                </a:solidFill>
+                <a:effectLst/>
+                <a:latin typeface="+mn-lt"/>
+                <a:ea typeface="+mn-ea"/>
+                <a:cs typeface="+mn-cs"/>
+              </a:rPr>
+              <a:t>The observed climate change in the 2001-2020 period is obtained from the MSWX-blend dataset. </a:t>
+            </a:r>
+          </a:p>
+          <a:p>
+            <a:pPr marL="171450" marR="0" lvl="0" indent="-171450" algn="l" defTabSz="914400" rtl="0" eaLnBrk="1" fontAlgn="auto" latinLnBrk="0" hangingPunct="1">
+              <a:lnSpc>
+                <a:spcPct val="100000"/>
+              </a:lnSpc>
+              <a:spcBef>
+                <a:spcPts val="0"/>
+              </a:spcBef>
+              <a:spcAft>
+                <a:spcPts val="0"/>
+              </a:spcAft>
+              <a:buClrTx/>
+              <a:buSzTx/>
+              <a:buFontTx/>
+              <a:buChar char="-"/>
+              <a:tabLst/>
+              <a:defRPr/>
+            </a:pPr>
+            <a:r>
+              <a:rPr lang="en-US" sz="1200" b="0" i="0" kern="1200" dirty="0">
+                <a:solidFill>
+                  <a:schemeClr val="tx1"/>
+                </a:solidFill>
+                <a:effectLst/>
+                <a:latin typeface="+mn-lt"/>
+                <a:ea typeface="+mn-ea"/>
+                <a:cs typeface="+mn-cs"/>
+              </a:rPr>
+              <a:t>Change values are for the SSP2-4.5 emissions scenario only. We have not provided other scenarios as they tend to differ only in magnitude rather than trends and variation, which are the focus of this plot. </a:t>
+            </a:r>
+          </a:p>
+          <a:p>
+            <a:pPr marL="171450" marR="0" lvl="0" indent="-171450" algn="l" defTabSz="914400" rtl="0" eaLnBrk="1" fontAlgn="auto" latinLnBrk="0" hangingPunct="1">
+              <a:lnSpc>
+                <a:spcPct val="100000"/>
+              </a:lnSpc>
+              <a:spcBef>
+                <a:spcPts val="0"/>
+              </a:spcBef>
+              <a:spcAft>
+                <a:spcPts val="0"/>
+              </a:spcAft>
+              <a:buClrTx/>
+              <a:buSzTx/>
+              <a:buFontTx/>
+              <a:buChar char="-"/>
+              <a:tabLst/>
+              <a:defRPr/>
+            </a:pPr>
+            <a:endParaRPr lang="en-US" sz="1200" b="0" i="0" kern="1200" dirty="0">
+              <a:solidFill>
+                <a:schemeClr val="tx1"/>
+              </a:solidFill>
+              <a:effectLst/>
+              <a:latin typeface="+mn-lt"/>
+              <a:ea typeface="+mn-ea"/>
+              <a:cs typeface="+mn-cs"/>
+            </a:endParaRPr>
+          </a:p>
+          <a:p>
+            <a:endParaRPr lang="en-US" sz="1200" b="0" i="0" kern="1200" dirty="0">
+              <a:solidFill>
+                <a:schemeClr val="tx1"/>
+              </a:solidFill>
+              <a:effectLst/>
+              <a:latin typeface="+mn-lt"/>
+              <a:ea typeface="+mn-ea"/>
+              <a:cs typeface="+mn-cs"/>
+            </a:endParaRPr>
           </a:p>
         </p:txBody>
       </p:sp>
@@ -628,7 +1001,7 @@
           <a:p>
             <a:fld id="{17D51559-7ED9-4495-A3C0-DDB2E926809E}" type="slidenum">
               <a:rPr lang="en-CA" smtClean="0"/>
-              <a:t>3</a:t>
+              <a:t>2</a:t>
             </a:fld>
             <a:endParaRPr lang="en-CA"/>
           </a:p>
@@ -637,7 +1010,7 @@
     </p:spTree>
     <p:extLst>
       <p:ext uri="{BB962C8B-B14F-4D97-AF65-F5344CB8AC3E}">
-        <p14:creationId xmlns:p14="http://schemas.microsoft.com/office/powerpoint/2010/main" val="3364697511"/>
+        <p14:creationId xmlns:p14="http://schemas.microsoft.com/office/powerpoint/2010/main" val="1038588260"/>
       </p:ext>
     </p:extLst>
   </p:cSld>
@@ -692,9 +1065,162 @@
           <a:lstStyle/>
           <a:p>
             <a:r>
-              <a:rPr lang="en-CA" dirty="0"/>
-              <a:t>Interpreting the diagram: Temperature trends are displayed as the red line and precipitation trends are displayed as the blue line.</a:t>
-            </a:r>
+              <a:rPr lang="en-US" dirty="0"/>
+              <a:t>The Walter-Lieth climate diagram was developed by German climatologists Heinrich Walter and Helmut Lieth in the 1950s–60s as part of their efforts to standardize the visualization of climate data for ecological zoning and global vegetation classification. The diagrams are a simple way to graphically represent seasonal patterns of temperature and precipitation at a given location, and to compare the climates of different regions.</a:t>
+            </a:r>
+          </a:p>
+          <a:p>
+            <a:endParaRPr lang="en-US" dirty="0"/>
+          </a:p>
+          <a:p>
+            <a:r>
+              <a:rPr lang="en-US" dirty="0"/>
+              <a:t>The diagram provides an overview of climate seasonality using a dual-axis plot. </a:t>
+            </a:r>
+          </a:p>
+          <a:p>
+            <a:r>
+              <a:rPr lang="en-US" b="1" dirty="0"/>
+              <a:t>- Temperature (°C)</a:t>
+            </a:r>
+            <a:r>
+              <a:rPr lang="en-US" dirty="0"/>
+              <a:t> is plotted on the left vertical axis.</a:t>
+            </a:r>
+          </a:p>
+          <a:p>
+            <a:r>
+              <a:rPr lang="en-US" b="1" dirty="0"/>
+              <a:t>- Precipitation (mm)</a:t>
+            </a:r>
+            <a:r>
+              <a:rPr lang="en-US" dirty="0"/>
+              <a:t> is plotted on the right, typically at a scale where </a:t>
+            </a:r>
+            <a:r>
+              <a:rPr lang="en-US" b="1" dirty="0"/>
+              <a:t>2 mm of precipitation corresponds to 1°C</a:t>
+            </a:r>
+            <a:r>
+              <a:rPr lang="en-US" dirty="0"/>
+              <a:t> (the 1:2 ratio).</a:t>
+            </a:r>
+          </a:p>
+          <a:p>
+            <a:endParaRPr lang="en-US" dirty="0"/>
+          </a:p>
+          <a:p>
+            <a:pPr marL="0" marR="0" lvl="0" indent="0" algn="l" defTabSz="914400" rtl="0" eaLnBrk="1" fontAlgn="auto" latinLnBrk="0" hangingPunct="1">
+              <a:lnSpc>
+                <a:spcPct val="100000"/>
+              </a:lnSpc>
+              <a:spcBef>
+                <a:spcPts val="0"/>
+              </a:spcBef>
+              <a:spcAft>
+                <a:spcPts val="0"/>
+              </a:spcAft>
+              <a:buClrTx/>
+              <a:buSzTx/>
+              <a:buFontTx/>
+              <a:buNone/>
+              <a:tabLst/>
+              <a:defRPr/>
+            </a:pPr>
+            <a:r>
+              <a:rPr lang="en-US" dirty="0"/>
+              <a:t>The 1:2 scaling allows for a simplified identification of arid periods. However, this is only a rough proxy for climatic moisture deficit and does not directly integrate potential evapotranspiration and relevant factors like wind, humidity, or radiation. Therefore, the diagram should not be interpreted as a quantitative water balance diagram.  </a:t>
+            </a:r>
+          </a:p>
+          <a:p>
+            <a:endParaRPr lang="en-US" dirty="0"/>
+          </a:p>
+          <a:p>
+            <a:endParaRPr lang="en-CA" dirty="0"/>
+          </a:p>
+        </p:txBody>
+      </p:sp>
+      <p:sp>
+        <p:nvSpPr>
+          <p:cNvPr id="4" name="Slide Number Placeholder 3"/>
+          <p:cNvSpPr>
+            <a:spLocks noGrp="1"/>
+          </p:cNvSpPr>
+          <p:nvPr>
+            <p:ph type="sldNum" sz="quarter" idx="5"/>
+          </p:nvPr>
+        </p:nvSpPr>
+        <p:spPr/>
+        <p:txBody>
+          <a:bodyPr/>
+          <a:lstStyle/>
+          <a:p>
+            <a:fld id="{17D51559-7ED9-4495-A3C0-DDB2E926809E}" type="slidenum">
+              <a:rPr lang="en-CA" smtClean="0"/>
+              <a:t>3</a:t>
+            </a:fld>
+            <a:endParaRPr lang="en-CA"/>
+          </a:p>
+        </p:txBody>
+      </p:sp>
+    </p:spTree>
+    <p:extLst>
+      <p:ext uri="{BB962C8B-B14F-4D97-AF65-F5344CB8AC3E}">
+        <p14:creationId xmlns:p14="http://schemas.microsoft.com/office/powerpoint/2010/main" val="3364697511"/>
+      </p:ext>
+    </p:extLst>
+  </p:cSld>
+  <p:clrMapOvr>
+    <a:masterClrMapping/>
+  </p:clrMapOvr>
+</p:notes>
+</file>
+
+<file path=ppt/notesSlides/notesSlide4.xml><?xml version="1.0" encoding="utf-8"?>
+<p:notes xmlns:a="http://schemas.openxmlformats.org/drawingml/2006/main" xmlns:r="http://schemas.openxmlformats.org/officeDocument/2006/relationships" xmlns:p="http://schemas.openxmlformats.org/presentationml/2006/main">
+  <p:cSld>
+    <p:spTree>
+      <p:nvGrpSpPr>
+        <p:cNvPr id="1" name=""/>
+        <p:cNvGrpSpPr/>
+        <p:nvPr/>
+      </p:nvGrpSpPr>
+      <p:grpSpPr>
+        <a:xfrm>
+          <a:off x="0" y="0"/>
+          <a:ext cx="0" cy="0"/>
+          <a:chOff x="0" y="0"/>
+          <a:chExt cx="0" cy="0"/>
+        </a:xfrm>
+      </p:grpSpPr>
+      <p:sp>
+        <p:nvSpPr>
+          <p:cNvPr id="2" name="Slide Image Placeholder 1"/>
+          <p:cNvSpPr>
+            <a:spLocks noGrp="1" noRot="1" noChangeAspect="1"/>
+          </p:cNvSpPr>
+          <p:nvPr>
+            <p:ph type="sldImg"/>
+          </p:nvPr>
+        </p:nvSpPr>
+        <p:spPr/>
+      </p:sp>
+      <p:sp>
+        <p:nvSpPr>
+          <p:cNvPr id="3" name="Notes Placeholder 2"/>
+          <p:cNvSpPr>
+            <a:spLocks noGrp="1"/>
+          </p:cNvSpPr>
+          <p:nvPr>
+            <p:ph type="body" idx="1"/>
+          </p:nvPr>
+        </p:nvSpPr>
+        <p:spPr/>
+        <p:txBody>
+          <a:bodyPr/>
+          <a:lstStyle/>
+          <a:p>
+            <a:endParaRPr lang="en-US" dirty="0"/>
           </a:p>
         </p:txBody>
       </p:sp>
@@ -3984,7 +4510,7 @@
           <p:nvPr/>
         </p:nvPicPr>
         <p:blipFill>
-          <a:blip r:embed="rId2"/>
+          <a:blip r:embed="rId3"/>
           <a:stretch>
             <a:fillRect/>
           </a:stretch>
@@ -4050,10 +4576,10 @@
           <p:nvPr/>
         </p:nvPicPr>
         <p:blipFill>
-          <a:blip r:embed="rId3">
+          <a:blip r:embed="rId4">
             <a:extLst>
               <a:ext uri="{96DAC541-7B7A-43D3-8B79-37D633B846F1}">
-                <asvg:svgBlip xmlns:asvg="http://schemas.microsoft.com/office/drawing/2016/SVG/main" r:embed="rId4"/>
+                <asvg:svgBlip xmlns:asvg="http://schemas.microsoft.com/office/drawing/2016/SVG/main" r:embed="rId5"/>
               </a:ext>
             </a:extLst>
           </a:blip>
@@ -4086,10 +4612,10 @@
           <p:nvPr/>
         </p:nvPicPr>
         <p:blipFill>
-          <a:blip r:embed="rId5">
+          <a:blip r:embed="rId6">
             <a:extLst>
               <a:ext uri="{96DAC541-7B7A-43D3-8B79-37D633B846F1}">
-                <asvg:svgBlip xmlns:asvg="http://schemas.microsoft.com/office/drawing/2016/SVG/main" r:embed="rId6"/>
+                <asvg:svgBlip xmlns:asvg="http://schemas.microsoft.com/office/drawing/2016/SVG/main" r:embed="rId7"/>
               </a:ext>
             </a:extLst>
           </a:blip>
@@ -4122,10 +4648,10 @@
           <p:nvPr/>
         </p:nvPicPr>
         <p:blipFill>
-          <a:blip r:embed="rId7">
+          <a:blip r:embed="rId8">
             <a:extLst>
               <a:ext uri="{96DAC541-7B7A-43D3-8B79-37D633B846F1}">
-                <asvg:svgBlip xmlns:asvg="http://schemas.microsoft.com/office/drawing/2016/SVG/main" r:embed="rId8"/>
+                <asvg:svgBlip xmlns:asvg="http://schemas.microsoft.com/office/drawing/2016/SVG/main" r:embed="rId9"/>
               </a:ext>
             </a:extLst>
           </a:blip>
@@ -4135,7 +4661,7 @@
         </p:blipFill>
         <p:spPr>
           <a:xfrm>
-            <a:off x="828158" y="3156846"/>
+            <a:off x="3670068" y="4070623"/>
             <a:ext cx="397933" cy="397933"/>
           </a:xfrm>
           <a:prstGeom prst="rect">
@@ -4158,10 +4684,10 @@
           <p:nvPr/>
         </p:nvPicPr>
         <p:blipFill>
-          <a:blip r:embed="rId9">
+          <a:blip r:embed="rId10">
             <a:extLst>
               <a:ext uri="{96DAC541-7B7A-43D3-8B79-37D633B846F1}">
-                <asvg:svgBlip xmlns:asvg="http://schemas.microsoft.com/office/drawing/2016/SVG/main" r:embed="rId10"/>
+                <asvg:svgBlip xmlns:asvg="http://schemas.microsoft.com/office/drawing/2016/SVG/main" r:embed="rId11"/>
               </a:ext>
             </a:extLst>
           </a:blip>
@@ -4171,7 +4697,7 @@
         </p:blipFill>
         <p:spPr>
           <a:xfrm>
-            <a:off x="3869267" y="4364811"/>
+            <a:off x="4338697" y="4468556"/>
             <a:ext cx="397933" cy="397933"/>
           </a:xfrm>
           <a:prstGeom prst="rect">
@@ -4194,10 +4720,10 @@
           <p:nvPr/>
         </p:nvPicPr>
         <p:blipFill>
-          <a:blip r:embed="rId11">
+          <a:blip r:embed="rId12">
             <a:extLst>
               <a:ext uri="{96DAC541-7B7A-43D3-8B79-37D633B846F1}">
-                <asvg:svgBlip xmlns:asvg="http://schemas.microsoft.com/office/drawing/2016/SVG/main" r:embed="rId12"/>
+                <asvg:svgBlip xmlns:asvg="http://schemas.microsoft.com/office/drawing/2016/SVG/main" r:embed="rId13"/>
               </a:ext>
             </a:extLst>
           </a:blip>
@@ -4230,10 +4756,10 @@
           <p:nvPr/>
         </p:nvPicPr>
         <p:blipFill>
-          <a:blip r:embed="rId13">
+          <a:blip r:embed="rId14">
             <a:extLst>
               <a:ext uri="{96DAC541-7B7A-43D3-8B79-37D633B846F1}">
-                <asvg:svgBlip xmlns:asvg="http://schemas.microsoft.com/office/drawing/2016/SVG/main" r:embed="rId14"/>
+                <asvg:svgBlip xmlns:asvg="http://schemas.microsoft.com/office/drawing/2016/SVG/main" r:embed="rId15"/>
               </a:ext>
             </a:extLst>
           </a:blip>
@@ -4243,7 +4769,7 @@
         </p:blipFill>
         <p:spPr>
           <a:xfrm>
-            <a:off x="7886700" y="2017627"/>
+            <a:off x="7316139" y="2511065"/>
             <a:ext cx="397933" cy="397933"/>
           </a:xfrm>
           <a:prstGeom prst="rect">
@@ -4265,8 +4791,8 @@
         </p:nvSpPr>
         <p:spPr>
           <a:xfrm>
-            <a:off x="9177866" y="1767183"/>
-            <a:ext cx="2870200" cy="3600986"/>
+            <a:off x="9214628" y="413545"/>
+            <a:ext cx="2870200" cy="6001643"/>
           </a:xfrm>
           <a:prstGeom prst="rect">
             <a:avLst/>
@@ -4281,7 +4807,7 @@
           <a:p>
             <a:r>
               <a:rPr lang="en-CA" sz="1200" dirty="0"/>
-              <a:t>Years axis</a:t>
+              <a:t>Year 1901-2100 on the x-axis</a:t>
             </a:r>
           </a:p>
           <a:p>
@@ -4290,7 +4816,7 @@
           <a:p>
             <a:r>
               <a:rPr lang="en-CA" sz="1200" dirty="0"/>
-              <a:t>Variable of interest axis</a:t>
+              <a:t>User-selected climate variable on the y-axis</a:t>
             </a:r>
           </a:p>
           <a:p>
@@ -4299,7 +4825,48 @@
           <a:p>
             <a:r>
               <a:rPr lang="en-CA" sz="1200" dirty="0"/>
-              <a:t>Simulated historic climate data using the recommended 8-GCM ensemble, from 1901-2014 (</a:t>
+              <a:t>Observed historic climate data by dataset (</a:t>
+            </a:r>
+            <a:r>
+              <a:rPr lang="en-CA" sz="1200" b="1" dirty="0"/>
+              <a:t>black</a:t>
+            </a:r>
+            <a:r>
+              <a:rPr lang="en-CA" sz="1200" dirty="0"/>
+              <a:t>, </a:t>
+            </a:r>
+            <a:r>
+              <a:rPr lang="en-CA" sz="1200" b="1" dirty="0">
+                <a:solidFill>
+                  <a:srgbClr val="F50C0A"/>
+                </a:solidFill>
+              </a:rPr>
+              <a:t>red </a:t>
+            </a:r>
+            <a:r>
+              <a:rPr lang="en-CA" sz="1200" dirty="0"/>
+              <a:t>and </a:t>
+            </a:r>
+            <a:r>
+              <a:rPr lang="en-CA" sz="1200" b="1" dirty="0">
+                <a:solidFill>
+                  <a:srgbClr val="0000FF"/>
+                </a:solidFill>
+              </a:rPr>
+              <a:t>blue </a:t>
+            </a:r>
+            <a:r>
+              <a:rPr lang="en-CA" sz="1200" dirty="0"/>
+              <a:t>lines), from 1901-2024</a:t>
+            </a:r>
+          </a:p>
+          <a:p>
+            <a:endParaRPr lang="en-CA" sz="1200" dirty="0"/>
+          </a:p>
+          <a:p>
+            <a:r>
+              <a:rPr lang="en-CA" sz="1200" dirty="0"/>
+              <a:t>Generalized range (min to max) of simulated historical year-to-year variability in the ensemble of 8 global climate models (GCMs), from 1901-2014 (</a:t>
             </a:r>
             <a:r>
               <a:rPr lang="en-CA" sz="1200" b="1" dirty="0">
@@ -4322,48 +4889,15 @@
           <a:p>
             <a:r>
               <a:rPr lang="en-CA" sz="1200" dirty="0"/>
-              <a:t>Observed historic climate data by dataset (</a:t>
-            </a:r>
-            <a:r>
-              <a:rPr lang="en-CA" sz="1200" b="1" dirty="0"/>
-              <a:t>black</a:t>
+              <a:t>Generalized range (min to max) of year-to-year variability the GCM ensemble </a:t>
+            </a:r>
+            <a:r>
+              <a:rPr lang="en-CA" sz="1200" dirty="0" err="1"/>
+              <a:t>ensemble</a:t>
             </a:r>
             <a:r>
               <a:rPr lang="en-CA" sz="1200" dirty="0"/>
-              <a:t>, </a:t>
-            </a:r>
-            <a:r>
-              <a:rPr lang="en-CA" sz="1200" b="1" dirty="0">
-                <a:solidFill>
-                  <a:srgbClr val="F50C0A"/>
-                </a:solidFill>
-              </a:rPr>
-              <a:t>red </a:t>
-            </a:r>
-            <a:r>
-              <a:rPr lang="en-CA" sz="1200" dirty="0"/>
-              <a:t>and </a:t>
-            </a:r>
-            <a:r>
-              <a:rPr lang="en-CA" sz="1200" b="1" dirty="0">
-                <a:solidFill>
-                  <a:srgbClr val="0000FF"/>
-                </a:solidFill>
-              </a:rPr>
-              <a:t>blue </a:t>
-            </a:r>
-            <a:r>
-              <a:rPr lang="en-CA" sz="1200" dirty="0"/>
-              <a:t>lines), from 1901-2023</a:t>
-            </a:r>
-          </a:p>
-          <a:p>
-            <a:endParaRPr lang="en-CA" sz="1200" dirty="0"/>
-          </a:p>
-          <a:p>
-            <a:r>
-              <a:rPr lang="en-CA" sz="1200" dirty="0"/>
-              <a:t>Simulated climate data, by range of each SSP (</a:t>
+              <a:t> for each SSP emissions scenario (</a:t>
             </a:r>
             <a:r>
               <a:rPr lang="en-CA" sz="1200" b="1" dirty="0">
@@ -4408,7 +4942,7 @@
           <a:p>
             <a:r>
               <a:rPr lang="en-CA" sz="1200" dirty="0"/>
-              <a:t>Projected change in variable of interest by SSP (</a:t>
+              <a:t>Generalized ensemble mean, by SSP (</a:t>
             </a:r>
             <a:r>
               <a:rPr lang="en-CA" sz="1200" b="1" dirty="0">
@@ -4447,6 +4981,30 @@
               <a:t>lines), from 2015-2100</a:t>
             </a:r>
           </a:p>
+          <a:p>
+            <a:endParaRPr lang="en-CA" sz="1200" dirty="0"/>
+          </a:p>
+          <a:p>
+            <a:r>
+              <a:rPr lang="en-CA" sz="1200" dirty="0"/>
+              <a:t>Change in the ensemble mean for each SSP at year 2100 relative to the 1961-1990 baseline</a:t>
+            </a:r>
+          </a:p>
+          <a:p>
+            <a:endParaRPr lang="en-CA" sz="1200" dirty="0"/>
+          </a:p>
+          <a:p>
+            <a:r>
+              <a:rPr lang="en-CA" sz="1200" dirty="0"/>
+              <a:t>1961-1990 baseline</a:t>
+            </a:r>
+          </a:p>
+          <a:p>
+            <a:endParaRPr lang="en-CA" sz="1200" dirty="0"/>
+          </a:p>
+          <a:p>
+            <a:endParaRPr lang="en-CA" sz="1200" dirty="0"/>
+          </a:p>
         </p:txBody>
       </p:sp>
       <p:pic>
@@ -4464,10 +5022,10 @@
           <p:nvPr/>
         </p:nvPicPr>
         <p:blipFill>
-          <a:blip r:embed="rId3">
+          <a:blip r:embed="rId4">
             <a:extLst>
               <a:ext uri="{96DAC541-7B7A-43D3-8B79-37D633B846F1}">
-                <asvg:svgBlip xmlns:asvg="http://schemas.microsoft.com/office/drawing/2016/SVG/main" r:embed="rId4"/>
+                <asvg:svgBlip xmlns:asvg="http://schemas.microsoft.com/office/drawing/2016/SVG/main" r:embed="rId5"/>
               </a:ext>
             </a:extLst>
           </a:blip>
@@ -4477,7 +5035,7 @@
         </p:blipFill>
         <p:spPr>
           <a:xfrm>
-            <a:off x="8779932" y="1717705"/>
+            <a:off x="8816697" y="346538"/>
             <a:ext cx="397933" cy="397933"/>
           </a:xfrm>
           <a:prstGeom prst="rect">
@@ -4500,10 +5058,10 @@
           <p:nvPr/>
         </p:nvPicPr>
         <p:blipFill>
-          <a:blip r:embed="rId5">
+          <a:blip r:embed="rId6">
             <a:extLst>
               <a:ext uri="{96DAC541-7B7A-43D3-8B79-37D633B846F1}">
-                <asvg:svgBlip xmlns:asvg="http://schemas.microsoft.com/office/drawing/2016/SVG/main" r:embed="rId6"/>
+                <asvg:svgBlip xmlns:asvg="http://schemas.microsoft.com/office/drawing/2016/SVG/main" r:embed="rId7"/>
               </a:ext>
             </a:extLst>
           </a:blip>
@@ -4513,7 +5071,7 @@
         </p:blipFill>
         <p:spPr>
           <a:xfrm>
-            <a:off x="8779931" y="2105053"/>
+            <a:off x="8816696" y="743825"/>
             <a:ext cx="397933" cy="397933"/>
           </a:xfrm>
           <a:prstGeom prst="rect">
@@ -4536,10 +5094,10 @@
           <p:nvPr/>
         </p:nvPicPr>
         <p:blipFill>
-          <a:blip r:embed="rId7">
+          <a:blip r:embed="rId8">
             <a:extLst>
               <a:ext uri="{96DAC541-7B7A-43D3-8B79-37D633B846F1}">
-                <asvg:svgBlip xmlns:asvg="http://schemas.microsoft.com/office/drawing/2016/SVG/main" r:embed="rId8"/>
+                <asvg:svgBlip xmlns:asvg="http://schemas.microsoft.com/office/drawing/2016/SVG/main" r:embed="rId9"/>
               </a:ext>
             </a:extLst>
           </a:blip>
@@ -4549,7 +5107,7 @@
         </p:blipFill>
         <p:spPr>
           <a:xfrm>
-            <a:off x="8779930" y="2502986"/>
+            <a:off x="8816695" y="1330599"/>
             <a:ext cx="397933" cy="397933"/>
           </a:xfrm>
           <a:prstGeom prst="rect">
@@ -4572,10 +5130,10 @@
           <p:nvPr/>
         </p:nvPicPr>
         <p:blipFill>
-          <a:blip r:embed="rId9">
+          <a:blip r:embed="rId10">
             <a:extLst>
               <a:ext uri="{96DAC541-7B7A-43D3-8B79-37D633B846F1}">
-                <asvg:svgBlip xmlns:asvg="http://schemas.microsoft.com/office/drawing/2016/SVG/main" r:embed="rId10"/>
+                <asvg:svgBlip xmlns:asvg="http://schemas.microsoft.com/office/drawing/2016/SVG/main" r:embed="rId11"/>
               </a:ext>
             </a:extLst>
           </a:blip>
@@ -4585,7 +5143,7 @@
         </p:blipFill>
         <p:spPr>
           <a:xfrm>
-            <a:off x="8779930" y="3234932"/>
+            <a:off x="8816695" y="2062545"/>
             <a:ext cx="397933" cy="397933"/>
           </a:xfrm>
           <a:prstGeom prst="rect">
@@ -4608,10 +5166,10 @@
           <p:nvPr/>
         </p:nvPicPr>
         <p:blipFill>
-          <a:blip r:embed="rId11">
+          <a:blip r:embed="rId12">
             <a:extLst>
               <a:ext uri="{96DAC541-7B7A-43D3-8B79-37D633B846F1}">
-                <asvg:svgBlip xmlns:asvg="http://schemas.microsoft.com/office/drawing/2016/SVG/main" r:embed="rId12"/>
+                <asvg:svgBlip xmlns:asvg="http://schemas.microsoft.com/office/drawing/2016/SVG/main" r:embed="rId13"/>
               </a:ext>
             </a:extLst>
           </a:blip>
@@ -4621,7 +5179,7 @@
         </p:blipFill>
         <p:spPr>
           <a:xfrm>
-            <a:off x="8779930" y="3966878"/>
+            <a:off x="8816695" y="3102600"/>
             <a:ext cx="397933" cy="397933"/>
           </a:xfrm>
           <a:prstGeom prst="rect">
@@ -4644,10 +5202,10 @@
           <p:nvPr/>
         </p:nvPicPr>
         <p:blipFill>
-          <a:blip r:embed="rId13">
+          <a:blip r:embed="rId14">
             <a:extLst>
               <a:ext uri="{96DAC541-7B7A-43D3-8B79-37D633B846F1}">
-                <asvg:svgBlip xmlns:asvg="http://schemas.microsoft.com/office/drawing/2016/SVG/main" r:embed="rId14"/>
+                <asvg:svgBlip xmlns:asvg="http://schemas.microsoft.com/office/drawing/2016/SVG/main" r:embed="rId15"/>
               </a:ext>
             </a:extLst>
           </a:blip>
@@ -4657,7 +5215,7 @@
         </p:blipFill>
         <p:spPr>
           <a:xfrm>
-            <a:off x="8787402" y="4667523"/>
+            <a:off x="8824167" y="4200815"/>
             <a:ext cx="397933" cy="397933"/>
           </a:xfrm>
           <a:prstGeom prst="rect">
@@ -4665,6 +5223,282 @@
           </a:prstGeom>
         </p:spPr>
       </p:pic>
+      <p:pic>
+        <p:nvPicPr>
+          <p:cNvPr id="3" name="Graphic 2" descr="Badge 7 with solid fill">
+            <a:extLst>
+              <a:ext uri="{FF2B5EF4-FFF2-40B4-BE49-F238E27FC236}">
+                <a16:creationId xmlns:a16="http://schemas.microsoft.com/office/drawing/2014/main" id="{09B16C52-0247-A310-A384-319A2C503ADA}"/>
+              </a:ext>
+            </a:extLst>
+          </p:cNvPr>
+          <p:cNvPicPr>
+            <a:picLocks noChangeAspect="1"/>
+          </p:cNvPicPr>
+          <p:nvPr/>
+        </p:nvPicPr>
+        <p:blipFill>
+          <a:blip r:embed="rId16">
+            <a:extLst>
+              <a:ext uri="{96DAC541-7B7A-43D3-8B79-37D633B846F1}">
+                <asvg:svgBlip xmlns:asvg="http://schemas.microsoft.com/office/drawing/2016/SVG/main" r:embed="rId17"/>
+              </a:ext>
+            </a:extLst>
+          </a:blip>
+          <a:stretch>
+            <a:fillRect/>
+          </a:stretch>
+        </p:blipFill>
+        <p:spPr>
+          <a:xfrm>
+            <a:off x="8838467" y="4936392"/>
+            <a:ext cx="369332" cy="369332"/>
+          </a:xfrm>
+          <a:prstGeom prst="rect">
+            <a:avLst/>
+          </a:prstGeom>
+        </p:spPr>
+      </p:pic>
+      <p:pic>
+        <p:nvPicPr>
+          <p:cNvPr id="4" name="Graphic 3" descr="Badge 7 with solid fill">
+            <a:extLst>
+              <a:ext uri="{FF2B5EF4-FFF2-40B4-BE49-F238E27FC236}">
+                <a16:creationId xmlns:a16="http://schemas.microsoft.com/office/drawing/2014/main" id="{A6E556EB-78C5-0DCD-C0CF-711A82844D2F}"/>
+              </a:ext>
+            </a:extLst>
+          </p:cNvPr>
+          <p:cNvPicPr>
+            <a:picLocks noChangeAspect="1"/>
+          </p:cNvPicPr>
+          <p:nvPr/>
+        </p:nvPicPr>
+        <p:blipFill>
+          <a:blip r:embed="rId16">
+            <a:extLst>
+              <a:ext uri="{96DAC541-7B7A-43D3-8B79-37D633B846F1}">
+                <asvg:svgBlip xmlns:asvg="http://schemas.microsoft.com/office/drawing/2016/SVG/main" r:embed="rId17"/>
+              </a:ext>
+            </a:extLst>
+          </a:blip>
+          <a:stretch>
+            <a:fillRect/>
+          </a:stretch>
+        </p:blipFill>
+        <p:spPr>
+          <a:xfrm>
+            <a:off x="7971675" y="1533039"/>
+            <a:ext cx="369332" cy="369332"/>
+          </a:xfrm>
+          <a:prstGeom prst="rect">
+            <a:avLst/>
+          </a:prstGeom>
+        </p:spPr>
+      </p:pic>
+      <p:pic>
+        <p:nvPicPr>
+          <p:cNvPr id="6" name="Graphic 5" descr="Badge 8 with solid fill">
+            <a:extLst>
+              <a:ext uri="{FF2B5EF4-FFF2-40B4-BE49-F238E27FC236}">
+                <a16:creationId xmlns:a16="http://schemas.microsoft.com/office/drawing/2014/main" id="{C9C64992-64FB-9E47-1949-53187E8F7940}"/>
+              </a:ext>
+            </a:extLst>
+          </p:cNvPr>
+          <p:cNvPicPr>
+            <a:picLocks noChangeAspect="1"/>
+          </p:cNvPicPr>
+          <p:nvPr/>
+        </p:nvPicPr>
+        <p:blipFill>
+          <a:blip r:embed="rId18">
+            <a:extLst>
+              <a:ext uri="{96DAC541-7B7A-43D3-8B79-37D633B846F1}">
+                <asvg:svgBlip xmlns:asvg="http://schemas.microsoft.com/office/drawing/2016/SVG/main" r:embed="rId19"/>
+              </a:ext>
+            </a:extLst>
+          </a:blip>
+          <a:stretch>
+            <a:fillRect/>
+          </a:stretch>
+        </p:blipFill>
+        <p:spPr>
+          <a:xfrm>
+            <a:off x="7823200" y="3966878"/>
+            <a:ext cx="369332" cy="369332"/>
+          </a:xfrm>
+          <a:prstGeom prst="rect">
+            <a:avLst/>
+          </a:prstGeom>
+        </p:spPr>
+      </p:pic>
+      <p:pic>
+        <p:nvPicPr>
+          <p:cNvPr id="8" name="Graphic 7" descr="Badge 8 with solid fill">
+            <a:extLst>
+              <a:ext uri="{FF2B5EF4-FFF2-40B4-BE49-F238E27FC236}">
+                <a16:creationId xmlns:a16="http://schemas.microsoft.com/office/drawing/2014/main" id="{B31B5D97-AD40-DC0F-3827-13790CC253EF}"/>
+              </a:ext>
+            </a:extLst>
+          </p:cNvPr>
+          <p:cNvPicPr>
+            <a:picLocks noChangeAspect="1"/>
+          </p:cNvPicPr>
+          <p:nvPr/>
+        </p:nvPicPr>
+        <p:blipFill>
+          <a:blip r:embed="rId18">
+            <a:extLst>
+              <a:ext uri="{96DAC541-7B7A-43D3-8B79-37D633B846F1}">
+                <asvg:svgBlip xmlns:asvg="http://schemas.microsoft.com/office/drawing/2016/SVG/main" r:embed="rId19"/>
+              </a:ext>
+            </a:extLst>
+          </a:blip>
+          <a:stretch>
+            <a:fillRect/>
+          </a:stretch>
+        </p:blipFill>
+        <p:spPr>
+          <a:xfrm>
+            <a:off x="8830995" y="5643970"/>
+            <a:ext cx="369332" cy="369332"/>
+          </a:xfrm>
+          <a:prstGeom prst="rect">
+            <a:avLst/>
+          </a:prstGeom>
+        </p:spPr>
+      </p:pic>
+      <p:cxnSp>
+        <p:nvCxnSpPr>
+          <p:cNvPr id="12" name="Straight Arrow Connector 11">
+            <a:extLst>
+              <a:ext uri="{FF2B5EF4-FFF2-40B4-BE49-F238E27FC236}">
+                <a16:creationId xmlns:a16="http://schemas.microsoft.com/office/drawing/2014/main" id="{1641D3E4-9AF7-72F6-2FB6-7E4991FCEF4F}"/>
+              </a:ext>
+            </a:extLst>
+          </p:cNvPr>
+          <p:cNvCxnSpPr>
+            <a:cxnSpLocks/>
+          </p:cNvCxnSpPr>
+          <p:nvPr/>
+        </p:nvCxnSpPr>
+        <p:spPr>
+          <a:xfrm flipH="1" flipV="1">
+            <a:off x="7082366" y="2434709"/>
+            <a:ext cx="322286" cy="198966"/>
+          </a:xfrm>
+          <a:prstGeom prst="straightConnector1">
+            <a:avLst/>
+          </a:prstGeom>
+          <a:ln>
+            <a:solidFill>
+              <a:schemeClr val="tx1"/>
+            </a:solidFill>
+            <a:tailEnd type="triangle"/>
+          </a:ln>
+        </p:spPr>
+        <p:style>
+          <a:lnRef idx="2">
+            <a:schemeClr val="accent1"/>
+          </a:lnRef>
+          <a:fillRef idx="0">
+            <a:schemeClr val="accent1"/>
+          </a:fillRef>
+          <a:effectRef idx="1">
+            <a:schemeClr val="accent1"/>
+          </a:effectRef>
+          <a:fontRef idx="minor">
+            <a:schemeClr val="tx1"/>
+          </a:fontRef>
+        </p:style>
+      </p:cxnSp>
+      <p:cxnSp>
+        <p:nvCxnSpPr>
+          <p:cNvPr id="16" name="Straight Arrow Connector 15">
+            <a:extLst>
+              <a:ext uri="{FF2B5EF4-FFF2-40B4-BE49-F238E27FC236}">
+                <a16:creationId xmlns:a16="http://schemas.microsoft.com/office/drawing/2014/main" id="{AA76AECE-E6EA-8F9D-3B41-3C8F87792E71}"/>
+              </a:ext>
+            </a:extLst>
+          </p:cNvPr>
+          <p:cNvCxnSpPr>
+            <a:cxnSpLocks/>
+          </p:cNvCxnSpPr>
+          <p:nvPr/>
+        </p:nvCxnSpPr>
+        <p:spPr>
+          <a:xfrm flipH="1">
+            <a:off x="7134860" y="2713047"/>
+            <a:ext cx="313690" cy="0"/>
+          </a:xfrm>
+          <a:prstGeom prst="straightConnector1">
+            <a:avLst/>
+          </a:prstGeom>
+          <a:ln>
+            <a:solidFill>
+              <a:schemeClr val="tx1"/>
+            </a:solidFill>
+            <a:tailEnd type="triangle"/>
+          </a:ln>
+        </p:spPr>
+        <p:style>
+          <a:lnRef idx="2">
+            <a:schemeClr val="accent1"/>
+          </a:lnRef>
+          <a:fillRef idx="0">
+            <a:schemeClr val="accent1"/>
+          </a:fillRef>
+          <a:effectRef idx="1">
+            <a:schemeClr val="accent1"/>
+          </a:effectRef>
+          <a:fontRef idx="minor">
+            <a:schemeClr val="tx1"/>
+          </a:fontRef>
+        </p:style>
+      </p:cxnSp>
+      <p:cxnSp>
+        <p:nvCxnSpPr>
+          <p:cNvPr id="26" name="Straight Arrow Connector 25">
+            <a:extLst>
+              <a:ext uri="{FF2B5EF4-FFF2-40B4-BE49-F238E27FC236}">
+                <a16:creationId xmlns:a16="http://schemas.microsoft.com/office/drawing/2014/main" id="{9E005CED-0509-FF2B-BA9E-01179FD84CB1}"/>
+              </a:ext>
+            </a:extLst>
+          </p:cNvPr>
+          <p:cNvCxnSpPr>
+            <a:cxnSpLocks/>
+          </p:cNvCxnSpPr>
+          <p:nvPr/>
+        </p:nvCxnSpPr>
+        <p:spPr>
+          <a:xfrm flipH="1">
+            <a:off x="7098030" y="2750820"/>
+            <a:ext cx="350520" cy="293370"/>
+          </a:xfrm>
+          <a:prstGeom prst="straightConnector1">
+            <a:avLst/>
+          </a:prstGeom>
+          <a:ln>
+            <a:solidFill>
+              <a:schemeClr val="tx1"/>
+            </a:solidFill>
+            <a:tailEnd type="triangle"/>
+          </a:ln>
+        </p:spPr>
+        <p:style>
+          <a:lnRef idx="2">
+            <a:schemeClr val="accent1"/>
+          </a:lnRef>
+          <a:fillRef idx="0">
+            <a:schemeClr val="accent1"/>
+          </a:fillRef>
+          <a:effectRef idx="1">
+            <a:schemeClr val="accent1"/>
+          </a:effectRef>
+          <a:fontRef idx="minor">
+            <a:schemeClr val="tx1"/>
+          </a:fontRef>
+        </p:style>
+      </p:cxnSp>
     </p:spTree>
     <p:extLst>
       <p:ext uri="{BB962C8B-B14F-4D97-AF65-F5344CB8AC3E}">
@@ -4789,7 +5623,7 @@
         </p:blipFill>
         <p:spPr>
           <a:xfrm>
-            <a:off x="4690533" y="4131734"/>
+            <a:off x="931534" y="2295200"/>
             <a:ext cx="389467" cy="389467"/>
           </a:xfrm>
           <a:prstGeom prst="rect">
@@ -4825,7 +5659,7 @@
         </p:blipFill>
         <p:spPr>
           <a:xfrm>
-            <a:off x="3716867" y="4411134"/>
+            <a:off x="3860656" y="4908312"/>
             <a:ext cx="397933" cy="397933"/>
           </a:xfrm>
           <a:prstGeom prst="rect">
@@ -4861,7 +5695,7 @@
         </p:blipFill>
         <p:spPr>
           <a:xfrm>
-            <a:off x="3920067" y="3828535"/>
+            <a:off x="3376282" y="4308447"/>
             <a:ext cx="397933" cy="397933"/>
           </a:xfrm>
           <a:prstGeom prst="rect">
@@ -4883,8 +5717,8 @@
         </p:nvSpPr>
         <p:spPr>
           <a:xfrm>
-            <a:off x="8643408" y="2090172"/>
-            <a:ext cx="2810934" cy="2862322"/>
+            <a:off x="8646582" y="790143"/>
+            <a:ext cx="2810934" cy="5262979"/>
           </a:xfrm>
           <a:prstGeom prst="rect">
             <a:avLst/>
@@ -4899,7 +5733,15 @@
           <a:p>
             <a:r>
               <a:rPr lang="en-CA" sz="1200" dirty="0"/>
-              <a:t>Trajectory line for a specific GCM, the coloured circles along the line shows the ensemble mean for that GCM in 20-year increments</a:t>
+              <a:t>All changes in climate are measured relative to the </a:t>
+            </a:r>
+            <a:r>
+              <a:rPr lang="en-CA" sz="1200" b="1" dirty="0"/>
+              <a:t>1961-1990 mean climate</a:t>
+            </a:r>
+            <a:r>
+              <a:rPr lang="en-CA" sz="1200" dirty="0"/>
+              <a:t>. </a:t>
             </a:r>
           </a:p>
           <a:p>
@@ -4908,7 +5750,15 @@
           <a:p>
             <a:r>
               <a:rPr lang="en-CA" sz="1200" dirty="0"/>
-              <a:t>Smaller circles around the trajectory are the individual model runs for a specific (will be the same colour as the trajectory line)</a:t>
+              <a:t>Small coloured dots are the </a:t>
+            </a:r>
+            <a:r>
+              <a:rPr lang="en-CA" sz="1200" b="1" dirty="0"/>
+              <a:t>20-year average change for one simulation </a:t>
+            </a:r>
+            <a:r>
+              <a:rPr lang="en-CA" sz="1200" dirty="0"/>
+              <a:t>of a global climate model (GCM) in the user-specified time period (2041-2060 in this case) for the SSP2-4.5 scenario.</a:t>
             </a:r>
           </a:p>
           <a:p>
@@ -4917,7 +5767,58 @@
           <a:p>
             <a:r>
               <a:rPr lang="en-CA" sz="1200" dirty="0"/>
-              <a:t>Large circle with model name on the trajectory line shows the ensemble mean for that specific GCM in the period plotted (here, it is the ensemble mean for 2041-2060)</a:t>
+              <a:t>Larger colored and labelled dots are the </a:t>
+            </a:r>
+            <a:r>
+              <a:rPr lang="en-CA" sz="1200" b="1" dirty="0"/>
+              <a:t>GCM’s mean change for the user-specified time period </a:t>
+            </a:r>
+            <a:r>
+              <a:rPr lang="en-CA" sz="1200" dirty="0"/>
+              <a:t>(i.e., the mean of the smaller dots of the same color). </a:t>
+            </a:r>
+          </a:p>
+          <a:p>
+            <a:endParaRPr lang="en-CA" sz="1200" dirty="0"/>
+          </a:p>
+          <a:p>
+            <a:r>
+              <a:rPr lang="en-CA" sz="1200" dirty="0"/>
+              <a:t>Other points along the line are the </a:t>
+            </a:r>
+            <a:r>
+              <a:rPr lang="en-CA" sz="1200" b="1" dirty="0"/>
+              <a:t>GCM mean change for other time periods </a:t>
+            </a:r>
+            <a:r>
+              <a:rPr lang="en-CA" sz="1200" dirty="0"/>
+              <a:t>(i.e., 2061-2080). </a:t>
+            </a:r>
+          </a:p>
+          <a:p>
+            <a:endParaRPr lang="en-CA" sz="1200" dirty="0"/>
+          </a:p>
+          <a:p>
+            <a:r>
+              <a:rPr lang="en-CA" sz="1200" dirty="0"/>
+              <a:t>The line connects the GCM mean changes for the five 20-year periods, indicating the </a:t>
+            </a:r>
+            <a:r>
+              <a:rPr lang="en-CA" sz="1200" b="1" dirty="0"/>
+              <a:t>trajectory of climate change</a:t>
+            </a:r>
+            <a:r>
+              <a:rPr lang="en-CA" sz="1200" dirty="0"/>
+              <a:t> projected by the GCM. </a:t>
+            </a:r>
+          </a:p>
+          <a:p>
+            <a:endParaRPr lang="en-CA" sz="1200" dirty="0"/>
+          </a:p>
+          <a:p>
+            <a:r>
+              <a:rPr lang="en-CA" sz="1200" dirty="0"/>
+              <a:t>The ensemble mean (grey cross) is the average of the GCM mean change (larger colored dots). </a:t>
             </a:r>
           </a:p>
         </p:txBody>
@@ -4950,7 +5851,7 @@
         </p:blipFill>
         <p:spPr>
           <a:xfrm>
-            <a:off x="8270875" y="2294467"/>
+            <a:off x="8270875" y="763844"/>
             <a:ext cx="389467" cy="389467"/>
           </a:xfrm>
           <a:prstGeom prst="rect">
@@ -4986,7 +5887,7 @@
         </p:blipFill>
         <p:spPr>
           <a:xfrm>
-            <a:off x="8248649" y="3204634"/>
+            <a:off x="8248649" y="1485170"/>
             <a:ext cx="397933" cy="397933"/>
           </a:xfrm>
           <a:prstGeom prst="rect">
@@ -5022,8 +5923,488 @@
         </p:blipFill>
         <p:spPr>
           <a:xfrm>
-            <a:off x="8248649" y="4226468"/>
+            <a:off x="8248649" y="2556699"/>
             <a:ext cx="397933" cy="397933"/>
+          </a:xfrm>
+          <a:prstGeom prst="rect">
+            <a:avLst/>
+          </a:prstGeom>
+        </p:spPr>
+      </p:pic>
+      <p:cxnSp>
+        <p:nvCxnSpPr>
+          <p:cNvPr id="2" name="Straight Arrow Connector 1">
+            <a:extLst>
+              <a:ext uri="{FF2B5EF4-FFF2-40B4-BE49-F238E27FC236}">
+                <a16:creationId xmlns:a16="http://schemas.microsoft.com/office/drawing/2014/main" id="{4D693E13-09A1-F6D0-5389-539603560792}"/>
+              </a:ext>
+            </a:extLst>
+          </p:cNvPr>
+          <p:cNvCxnSpPr>
+            <a:cxnSpLocks/>
+          </p:cNvCxnSpPr>
+          <p:nvPr/>
+        </p:nvCxnSpPr>
+        <p:spPr>
+          <a:xfrm flipV="1">
+            <a:off x="4133614" y="4855597"/>
+            <a:ext cx="185803" cy="194400"/>
+          </a:xfrm>
+          <a:prstGeom prst="straightConnector1">
+            <a:avLst/>
+          </a:prstGeom>
+          <a:ln>
+            <a:solidFill>
+              <a:schemeClr val="tx1"/>
+            </a:solidFill>
+            <a:tailEnd type="triangle"/>
+          </a:ln>
+        </p:spPr>
+        <p:style>
+          <a:lnRef idx="2">
+            <a:schemeClr val="accent1"/>
+          </a:lnRef>
+          <a:fillRef idx="0">
+            <a:schemeClr val="accent1"/>
+          </a:fillRef>
+          <a:effectRef idx="1">
+            <a:schemeClr val="accent1"/>
+          </a:effectRef>
+          <a:fontRef idx="minor">
+            <a:schemeClr val="tx1"/>
+          </a:fontRef>
+        </p:style>
+      </p:cxnSp>
+      <p:cxnSp>
+        <p:nvCxnSpPr>
+          <p:cNvPr id="4" name="Straight Arrow Connector 3">
+            <a:extLst>
+              <a:ext uri="{FF2B5EF4-FFF2-40B4-BE49-F238E27FC236}">
+                <a16:creationId xmlns:a16="http://schemas.microsoft.com/office/drawing/2014/main" id="{A7B617E9-C2F8-0210-3C7E-0A8A963F1F4F}"/>
+              </a:ext>
+            </a:extLst>
+          </p:cNvPr>
+          <p:cNvCxnSpPr>
+            <a:cxnSpLocks/>
+          </p:cNvCxnSpPr>
+          <p:nvPr/>
+        </p:nvCxnSpPr>
+        <p:spPr>
+          <a:xfrm flipV="1">
+            <a:off x="3682194" y="4232221"/>
+            <a:ext cx="185803" cy="194400"/>
+          </a:xfrm>
+          <a:prstGeom prst="straightConnector1">
+            <a:avLst/>
+          </a:prstGeom>
+          <a:ln>
+            <a:solidFill>
+              <a:schemeClr val="tx1"/>
+            </a:solidFill>
+            <a:tailEnd type="triangle"/>
+          </a:ln>
+        </p:spPr>
+        <p:style>
+          <a:lnRef idx="2">
+            <a:schemeClr val="accent1"/>
+          </a:lnRef>
+          <a:fillRef idx="0">
+            <a:schemeClr val="accent1"/>
+          </a:fillRef>
+          <a:effectRef idx="1">
+            <a:schemeClr val="accent1"/>
+          </a:effectRef>
+          <a:fontRef idx="minor">
+            <a:schemeClr val="tx1"/>
+          </a:fontRef>
+        </p:style>
+      </p:cxnSp>
+      <p:cxnSp>
+        <p:nvCxnSpPr>
+          <p:cNvPr id="6" name="Straight Arrow Connector 5">
+            <a:extLst>
+              <a:ext uri="{FF2B5EF4-FFF2-40B4-BE49-F238E27FC236}">
+                <a16:creationId xmlns:a16="http://schemas.microsoft.com/office/drawing/2014/main" id="{41B401D7-3120-763E-BBAC-7BDB37A70F25}"/>
+              </a:ext>
+            </a:extLst>
+          </p:cNvPr>
+          <p:cNvCxnSpPr>
+            <a:cxnSpLocks/>
+          </p:cNvCxnSpPr>
+          <p:nvPr/>
+        </p:nvCxnSpPr>
+        <p:spPr>
+          <a:xfrm flipH="1">
+            <a:off x="4502372" y="3937895"/>
+            <a:ext cx="209945" cy="207939"/>
+          </a:xfrm>
+          <a:prstGeom prst="straightConnector1">
+            <a:avLst/>
+          </a:prstGeom>
+          <a:ln>
+            <a:solidFill>
+              <a:schemeClr val="tx1"/>
+            </a:solidFill>
+            <a:tailEnd type="triangle"/>
+          </a:ln>
+        </p:spPr>
+        <p:style>
+          <a:lnRef idx="2">
+            <a:schemeClr val="accent1"/>
+          </a:lnRef>
+          <a:fillRef idx="0">
+            <a:schemeClr val="accent1"/>
+          </a:fillRef>
+          <a:effectRef idx="1">
+            <a:schemeClr val="accent1"/>
+          </a:effectRef>
+          <a:fontRef idx="minor">
+            <a:schemeClr val="tx1"/>
+          </a:fontRef>
+        </p:style>
+      </p:cxnSp>
+      <p:cxnSp>
+        <p:nvCxnSpPr>
+          <p:cNvPr id="12" name="Straight Arrow Connector 11">
+            <a:extLst>
+              <a:ext uri="{FF2B5EF4-FFF2-40B4-BE49-F238E27FC236}">
+                <a16:creationId xmlns:a16="http://schemas.microsoft.com/office/drawing/2014/main" id="{CCE0564D-D9D7-136D-D7E3-737F47543BDF}"/>
+              </a:ext>
+            </a:extLst>
+          </p:cNvPr>
+          <p:cNvCxnSpPr>
+            <a:cxnSpLocks/>
+          </p:cNvCxnSpPr>
+          <p:nvPr/>
+        </p:nvCxnSpPr>
+        <p:spPr>
+          <a:xfrm flipH="1">
+            <a:off x="4915939" y="4328855"/>
+            <a:ext cx="209945" cy="207939"/>
+          </a:xfrm>
+          <a:prstGeom prst="straightConnector1">
+            <a:avLst/>
+          </a:prstGeom>
+          <a:ln>
+            <a:solidFill>
+              <a:schemeClr val="tx1"/>
+            </a:solidFill>
+            <a:tailEnd type="triangle"/>
+          </a:ln>
+        </p:spPr>
+        <p:style>
+          <a:lnRef idx="2">
+            <a:schemeClr val="accent1"/>
+          </a:lnRef>
+          <a:fillRef idx="0">
+            <a:schemeClr val="accent1"/>
+          </a:fillRef>
+          <a:effectRef idx="1">
+            <a:schemeClr val="accent1"/>
+          </a:effectRef>
+          <a:fontRef idx="minor">
+            <a:schemeClr val="tx1"/>
+          </a:fontRef>
+        </p:style>
+      </p:cxnSp>
+      <p:pic>
+        <p:nvPicPr>
+          <p:cNvPr id="18" name="Graphic 17" descr="Badge 4 with solid fill">
+            <a:extLst>
+              <a:ext uri="{FF2B5EF4-FFF2-40B4-BE49-F238E27FC236}">
+                <a16:creationId xmlns:a16="http://schemas.microsoft.com/office/drawing/2014/main" id="{37872E19-815B-762C-5D21-5E33169FCF92}"/>
+              </a:ext>
+            </a:extLst>
+          </p:cNvPr>
+          <p:cNvPicPr>
+            <a:picLocks noChangeAspect="1"/>
+          </p:cNvPicPr>
+          <p:nvPr/>
+        </p:nvPicPr>
+        <p:blipFill>
+          <a:blip r:embed="rId10">
+            <a:extLst>
+              <a:ext uri="{96DAC541-7B7A-43D3-8B79-37D633B846F1}">
+                <asvg:svgBlip xmlns:asvg="http://schemas.microsoft.com/office/drawing/2016/SVG/main" r:embed="rId11"/>
+              </a:ext>
+            </a:extLst>
+          </a:blip>
+          <a:stretch>
+            <a:fillRect/>
+          </a:stretch>
+        </p:blipFill>
+        <p:spPr>
+          <a:xfrm>
+            <a:off x="4593528" y="3669493"/>
+            <a:ext cx="369332" cy="369332"/>
+          </a:xfrm>
+          <a:prstGeom prst="rect">
+            <a:avLst/>
+          </a:prstGeom>
+        </p:spPr>
+      </p:pic>
+      <p:pic>
+        <p:nvPicPr>
+          <p:cNvPr id="19" name="Graphic 18" descr="Badge 5 with solid fill">
+            <a:extLst>
+              <a:ext uri="{FF2B5EF4-FFF2-40B4-BE49-F238E27FC236}">
+                <a16:creationId xmlns:a16="http://schemas.microsoft.com/office/drawing/2014/main" id="{B9770BC5-73CA-B58F-7D50-A4361EB19177}"/>
+              </a:ext>
+            </a:extLst>
+          </p:cNvPr>
+          <p:cNvPicPr>
+            <a:picLocks noChangeAspect="1"/>
+          </p:cNvPicPr>
+          <p:nvPr/>
+        </p:nvPicPr>
+        <p:blipFill>
+          <a:blip r:embed="rId12">
+            <a:extLst>
+              <a:ext uri="{96DAC541-7B7A-43D3-8B79-37D633B846F1}">
+                <asvg:svgBlip xmlns:asvg="http://schemas.microsoft.com/office/drawing/2016/SVG/main" r:embed="rId13"/>
+              </a:ext>
+            </a:extLst>
+          </a:blip>
+          <a:stretch>
+            <a:fillRect/>
+          </a:stretch>
+        </p:blipFill>
+        <p:spPr>
+          <a:xfrm>
+            <a:off x="5030850" y="4077167"/>
+            <a:ext cx="369332" cy="369332"/>
+          </a:xfrm>
+          <a:prstGeom prst="rect">
+            <a:avLst/>
+          </a:prstGeom>
+        </p:spPr>
+      </p:pic>
+      <p:cxnSp>
+        <p:nvCxnSpPr>
+          <p:cNvPr id="20" name="Straight Arrow Connector 19">
+            <a:extLst>
+              <a:ext uri="{FF2B5EF4-FFF2-40B4-BE49-F238E27FC236}">
+                <a16:creationId xmlns:a16="http://schemas.microsoft.com/office/drawing/2014/main" id="{C517F06C-75CF-B101-A941-C7117D7DA972}"/>
+              </a:ext>
+            </a:extLst>
+          </p:cNvPr>
+          <p:cNvCxnSpPr>
+            <a:cxnSpLocks/>
+          </p:cNvCxnSpPr>
+          <p:nvPr/>
+        </p:nvCxnSpPr>
+        <p:spPr>
+          <a:xfrm>
+            <a:off x="1222513" y="2590636"/>
+            <a:ext cx="188844" cy="192321"/>
+          </a:xfrm>
+          <a:prstGeom prst="straightConnector1">
+            <a:avLst/>
+          </a:prstGeom>
+          <a:ln>
+            <a:solidFill>
+              <a:schemeClr val="tx1"/>
+            </a:solidFill>
+            <a:tailEnd type="triangle"/>
+          </a:ln>
+        </p:spPr>
+        <p:style>
+          <a:lnRef idx="2">
+            <a:schemeClr val="accent1"/>
+          </a:lnRef>
+          <a:fillRef idx="0">
+            <a:schemeClr val="accent1"/>
+          </a:fillRef>
+          <a:effectRef idx="1">
+            <a:schemeClr val="accent1"/>
+          </a:effectRef>
+          <a:fontRef idx="minor">
+            <a:schemeClr val="tx1"/>
+          </a:fontRef>
+        </p:style>
+      </p:cxnSp>
+      <p:pic>
+        <p:nvPicPr>
+          <p:cNvPr id="26" name="Graphic 25" descr="Badge 4 with solid fill">
+            <a:extLst>
+              <a:ext uri="{FF2B5EF4-FFF2-40B4-BE49-F238E27FC236}">
+                <a16:creationId xmlns:a16="http://schemas.microsoft.com/office/drawing/2014/main" id="{C156E1A3-AB1C-1213-FF94-984099BCEB3F}"/>
+              </a:ext>
+            </a:extLst>
+          </p:cNvPr>
+          <p:cNvPicPr>
+            <a:picLocks noChangeAspect="1"/>
+          </p:cNvPicPr>
+          <p:nvPr/>
+        </p:nvPicPr>
+        <p:blipFill>
+          <a:blip r:embed="rId10">
+            <a:extLst>
+              <a:ext uri="{96DAC541-7B7A-43D3-8B79-37D633B846F1}">
+                <asvg:svgBlip xmlns:asvg="http://schemas.microsoft.com/office/drawing/2016/SVG/main" r:embed="rId11"/>
+              </a:ext>
+            </a:extLst>
+          </a:blip>
+          <a:stretch>
+            <a:fillRect/>
+          </a:stretch>
+        </p:blipFill>
+        <p:spPr>
+          <a:xfrm>
+            <a:off x="8248649" y="3486779"/>
+            <a:ext cx="369332" cy="369332"/>
+          </a:xfrm>
+          <a:prstGeom prst="rect">
+            <a:avLst/>
+          </a:prstGeom>
+        </p:spPr>
+      </p:pic>
+      <p:pic>
+        <p:nvPicPr>
+          <p:cNvPr id="27" name="Graphic 26" descr="Badge 5 with solid fill">
+            <a:extLst>
+              <a:ext uri="{FF2B5EF4-FFF2-40B4-BE49-F238E27FC236}">
+                <a16:creationId xmlns:a16="http://schemas.microsoft.com/office/drawing/2014/main" id="{A5CB50B4-8912-095D-3ECD-60C3B97F14A9}"/>
+              </a:ext>
+            </a:extLst>
+          </p:cNvPr>
+          <p:cNvPicPr>
+            <a:picLocks noChangeAspect="1"/>
+          </p:cNvPicPr>
+          <p:nvPr/>
+        </p:nvPicPr>
+        <p:blipFill>
+          <a:blip r:embed="rId12">
+            <a:extLst>
+              <a:ext uri="{96DAC541-7B7A-43D3-8B79-37D633B846F1}">
+                <asvg:svgBlip xmlns:asvg="http://schemas.microsoft.com/office/drawing/2016/SVG/main" r:embed="rId13"/>
+              </a:ext>
+            </a:extLst>
+          </a:blip>
+          <a:stretch>
+            <a:fillRect/>
+          </a:stretch>
+        </p:blipFill>
+        <p:spPr>
+          <a:xfrm>
+            <a:off x="8245476" y="4227667"/>
+            <a:ext cx="369332" cy="369332"/>
+          </a:xfrm>
+          <a:prstGeom prst="rect">
+            <a:avLst/>
+          </a:prstGeom>
+        </p:spPr>
+      </p:pic>
+      <p:pic>
+        <p:nvPicPr>
+          <p:cNvPr id="28" name="Graphic 27" descr="Badge 6 with solid fill">
+            <a:extLst>
+              <a:ext uri="{FF2B5EF4-FFF2-40B4-BE49-F238E27FC236}">
+                <a16:creationId xmlns:a16="http://schemas.microsoft.com/office/drawing/2014/main" id="{FC0DD117-1EEA-B2CD-A1D4-2465435DC20C}"/>
+              </a:ext>
+            </a:extLst>
+          </p:cNvPr>
+          <p:cNvPicPr>
+            <a:picLocks noChangeAspect="1"/>
+          </p:cNvPicPr>
+          <p:nvPr/>
+        </p:nvPicPr>
+        <p:blipFill>
+          <a:blip r:embed="rId14">
+            <a:extLst>
+              <a:ext uri="{96DAC541-7B7A-43D3-8B79-37D633B846F1}">
+                <asvg:svgBlip xmlns:asvg="http://schemas.microsoft.com/office/drawing/2016/SVG/main" r:embed="rId15"/>
+              </a:ext>
+            </a:extLst>
+          </a:blip>
+          <a:stretch>
+            <a:fillRect/>
+          </a:stretch>
+        </p:blipFill>
+        <p:spPr>
+          <a:xfrm>
+            <a:off x="3394944" y="2360855"/>
+            <a:ext cx="369332" cy="369332"/>
+          </a:xfrm>
+          <a:prstGeom prst="rect">
+            <a:avLst/>
+          </a:prstGeom>
+        </p:spPr>
+      </p:pic>
+      <p:cxnSp>
+        <p:nvCxnSpPr>
+          <p:cNvPr id="29" name="Straight Arrow Connector 28">
+            <a:extLst>
+              <a:ext uri="{FF2B5EF4-FFF2-40B4-BE49-F238E27FC236}">
+                <a16:creationId xmlns:a16="http://schemas.microsoft.com/office/drawing/2014/main" id="{4AF337A1-BC61-A246-A958-698F579C40E7}"/>
+              </a:ext>
+            </a:extLst>
+          </p:cNvPr>
+          <p:cNvCxnSpPr>
+            <a:cxnSpLocks/>
+          </p:cNvCxnSpPr>
+          <p:nvPr/>
+        </p:nvCxnSpPr>
+        <p:spPr>
+          <a:xfrm flipH="1">
+            <a:off x="3019237" y="2590636"/>
+            <a:ext cx="476002" cy="363996"/>
+          </a:xfrm>
+          <a:prstGeom prst="straightConnector1">
+            <a:avLst/>
+          </a:prstGeom>
+          <a:ln>
+            <a:solidFill>
+              <a:schemeClr val="tx1"/>
+            </a:solidFill>
+            <a:tailEnd type="triangle"/>
+          </a:ln>
+        </p:spPr>
+        <p:style>
+          <a:lnRef idx="2">
+            <a:schemeClr val="accent1"/>
+          </a:lnRef>
+          <a:fillRef idx="0">
+            <a:schemeClr val="accent1"/>
+          </a:fillRef>
+          <a:effectRef idx="1">
+            <a:schemeClr val="accent1"/>
+          </a:effectRef>
+          <a:fontRef idx="minor">
+            <a:schemeClr val="tx1"/>
+          </a:fontRef>
+        </p:style>
+      </p:cxnSp>
+      <p:pic>
+        <p:nvPicPr>
+          <p:cNvPr id="31" name="Graphic 30" descr="Badge 6 with solid fill">
+            <a:extLst>
+              <a:ext uri="{FF2B5EF4-FFF2-40B4-BE49-F238E27FC236}">
+                <a16:creationId xmlns:a16="http://schemas.microsoft.com/office/drawing/2014/main" id="{9B728A33-D03A-6C80-76CA-3922AF7B6AFE}"/>
+              </a:ext>
+            </a:extLst>
+          </p:cNvPr>
+          <p:cNvPicPr>
+            <a:picLocks noChangeAspect="1"/>
+          </p:cNvPicPr>
+          <p:nvPr/>
+        </p:nvPicPr>
+        <p:blipFill>
+          <a:blip r:embed="rId14">
+            <a:extLst>
+              <a:ext uri="{96DAC541-7B7A-43D3-8B79-37D633B846F1}">
+                <asvg:svgBlip xmlns:asvg="http://schemas.microsoft.com/office/drawing/2016/SVG/main" r:embed="rId15"/>
+              </a:ext>
+            </a:extLst>
+          </a:blip>
+          <a:stretch>
+            <a:fillRect/>
+          </a:stretch>
+        </p:blipFill>
+        <p:spPr>
+          <a:xfrm>
+            <a:off x="8245773" y="5147035"/>
+            <a:ext cx="369332" cy="369332"/>
           </a:xfrm>
           <a:prstGeom prst="rect">
             <a:avLst/>
@@ -5492,7 +6873,7 @@
           <a:p>
             <a:r>
               <a:rPr lang="en-CA" sz="1200" dirty="0"/>
-              <a:t>Months with frost likely (</a:t>
+              <a:t>Months with likely frost (</a:t>
             </a:r>
             <a:r>
               <a:rPr lang="en-CA" sz="1200" b="1" dirty="0">
@@ -6047,78 +7428,6 @@
           </a:p>
         </p:txBody>
       </p:sp>
-      <p:pic>
-        <p:nvPicPr>
-          <p:cNvPr id="21" name="Graphic 20" descr="Arrow Right with solid fill">
-            <a:extLst>
-              <a:ext uri="{FF2B5EF4-FFF2-40B4-BE49-F238E27FC236}">
-                <a16:creationId xmlns:a16="http://schemas.microsoft.com/office/drawing/2014/main" id="{6F32C121-7FB0-8BC2-94EA-A92D6CA67FCA}"/>
-              </a:ext>
-            </a:extLst>
-          </p:cNvPr>
-          <p:cNvPicPr>
-            <a:picLocks noChangeAspect="1"/>
-          </p:cNvPicPr>
-          <p:nvPr/>
-        </p:nvPicPr>
-        <p:blipFill>
-          <a:blip r:embed="rId4">
-            <a:extLst>
-              <a:ext uri="{96DAC541-7B7A-43D3-8B79-37D633B846F1}">
-                <asvg:svgBlip xmlns:asvg="http://schemas.microsoft.com/office/drawing/2016/SVG/main" r:embed="rId5"/>
-              </a:ext>
-            </a:extLst>
-          </a:blip>
-          <a:stretch>
-            <a:fillRect/>
-          </a:stretch>
-        </p:blipFill>
-        <p:spPr>
-          <a:xfrm>
-            <a:off x="1820333" y="2057400"/>
-            <a:ext cx="914400" cy="914400"/>
-          </a:xfrm>
-          <a:prstGeom prst="rect">
-            <a:avLst/>
-          </a:prstGeom>
-        </p:spPr>
-      </p:pic>
-      <p:pic>
-        <p:nvPicPr>
-          <p:cNvPr id="24" name="Graphic 23" descr="Line arrow: Straight with solid fill">
-            <a:extLst>
-              <a:ext uri="{FF2B5EF4-FFF2-40B4-BE49-F238E27FC236}">
-                <a16:creationId xmlns:a16="http://schemas.microsoft.com/office/drawing/2014/main" id="{09FBFD7A-B10C-7BEF-B335-E2C0E08932B1}"/>
-              </a:ext>
-            </a:extLst>
-          </p:cNvPr>
-          <p:cNvPicPr>
-            <a:picLocks noChangeAspect="1"/>
-          </p:cNvPicPr>
-          <p:nvPr/>
-        </p:nvPicPr>
-        <p:blipFill>
-          <a:blip r:embed="rId6">
-            <a:extLst>
-              <a:ext uri="{96DAC541-7B7A-43D3-8B79-37D633B846F1}">
-                <asvg:svgBlip xmlns:asvg="http://schemas.microsoft.com/office/drawing/2016/SVG/main" r:embed="rId7"/>
-              </a:ext>
-            </a:extLst>
-          </a:blip>
-          <a:stretch>
-            <a:fillRect/>
-          </a:stretch>
-        </p:blipFill>
-        <p:spPr>
-          <a:xfrm>
-            <a:off x="9297459" y="946121"/>
-            <a:ext cx="914400" cy="914400"/>
-          </a:xfrm>
-          <a:prstGeom prst="rect">
-            <a:avLst/>
-          </a:prstGeom>
-        </p:spPr>
-      </p:pic>
       <p:sp>
         <p:nvSpPr>
           <p:cNvPr id="25" name="TextBox 24">
@@ -6177,42 +7486,6 @@
           </a:p>
         </p:txBody>
       </p:sp>
-      <p:pic>
-        <p:nvPicPr>
-          <p:cNvPr id="27" name="Graphic 26" descr="Arrow Down with solid fill">
-            <a:extLst>
-              <a:ext uri="{FF2B5EF4-FFF2-40B4-BE49-F238E27FC236}">
-                <a16:creationId xmlns:a16="http://schemas.microsoft.com/office/drawing/2014/main" id="{E45BE004-890C-73C6-EE27-395508031316}"/>
-              </a:ext>
-            </a:extLst>
-          </p:cNvPr>
-          <p:cNvPicPr>
-            <a:picLocks noChangeAspect="1"/>
-          </p:cNvPicPr>
-          <p:nvPr/>
-        </p:nvPicPr>
-        <p:blipFill>
-          <a:blip r:embed="rId8">
-            <a:extLst>
-              <a:ext uri="{96DAC541-7B7A-43D3-8B79-37D633B846F1}">
-                <asvg:svgBlip xmlns:asvg="http://schemas.microsoft.com/office/drawing/2016/SVG/main" r:embed="rId9"/>
-              </a:ext>
-            </a:extLst>
-          </a:blip>
-          <a:stretch>
-            <a:fillRect/>
-          </a:stretch>
-        </p:blipFill>
-        <p:spPr>
-          <a:xfrm>
-            <a:off x="6096000" y="3776132"/>
-            <a:ext cx="914400" cy="914400"/>
-          </a:xfrm>
-          <a:prstGeom prst="rect">
-            <a:avLst/>
-          </a:prstGeom>
-        </p:spPr>
-      </p:pic>
       <p:sp>
         <p:nvSpPr>
           <p:cNvPr id="29" name="TextBox 28">
@@ -6283,6 +7556,136 @@
           </a:p>
         </p:txBody>
       </p:sp>
+      <p:cxnSp>
+        <p:nvCxnSpPr>
+          <p:cNvPr id="3" name="Straight Arrow Connector 2">
+            <a:extLst>
+              <a:ext uri="{FF2B5EF4-FFF2-40B4-BE49-F238E27FC236}">
+                <a16:creationId xmlns:a16="http://schemas.microsoft.com/office/drawing/2014/main" id="{76A3993D-EB61-D6D5-8A03-8A5C788C956E}"/>
+              </a:ext>
+            </a:extLst>
+          </p:cNvPr>
+          <p:cNvCxnSpPr/>
+          <p:nvPr/>
+        </p:nvCxnSpPr>
+        <p:spPr>
+          <a:xfrm>
+            <a:off x="1920876" y="2494722"/>
+            <a:ext cx="3187837" cy="0"/>
+          </a:xfrm>
+          <a:prstGeom prst="straightConnector1">
+            <a:avLst/>
+          </a:prstGeom>
+          <a:ln w="44450">
+            <a:solidFill>
+              <a:schemeClr val="tx1"/>
+            </a:solidFill>
+            <a:tailEnd type="triangle" w="lg" len="lg"/>
+          </a:ln>
+        </p:spPr>
+        <p:style>
+          <a:lnRef idx="2">
+            <a:schemeClr val="accent1"/>
+          </a:lnRef>
+          <a:fillRef idx="0">
+            <a:schemeClr val="accent1"/>
+          </a:fillRef>
+          <a:effectRef idx="1">
+            <a:schemeClr val="accent1"/>
+          </a:effectRef>
+          <a:fontRef idx="minor">
+            <a:schemeClr val="tx1"/>
+          </a:fontRef>
+        </p:style>
+      </p:cxnSp>
+      <p:cxnSp>
+        <p:nvCxnSpPr>
+          <p:cNvPr id="4" name="Straight Arrow Connector 3">
+            <a:extLst>
+              <a:ext uri="{FF2B5EF4-FFF2-40B4-BE49-F238E27FC236}">
+                <a16:creationId xmlns:a16="http://schemas.microsoft.com/office/drawing/2014/main" id="{7F000A5F-1899-DC22-51D7-814BC2FD660D}"/>
+              </a:ext>
+            </a:extLst>
+          </p:cNvPr>
+          <p:cNvCxnSpPr>
+            <a:cxnSpLocks/>
+          </p:cNvCxnSpPr>
+          <p:nvPr/>
+        </p:nvCxnSpPr>
+        <p:spPr>
+          <a:xfrm>
+            <a:off x="6579704" y="3776132"/>
+            <a:ext cx="0" cy="865442"/>
+          </a:xfrm>
+          <a:prstGeom prst="straightConnector1">
+            <a:avLst/>
+          </a:prstGeom>
+          <a:ln w="44450">
+            <a:solidFill>
+              <a:schemeClr val="tx1"/>
+            </a:solidFill>
+            <a:tailEnd type="triangle" w="lg" len="lg"/>
+          </a:ln>
+        </p:spPr>
+        <p:style>
+          <a:lnRef idx="2">
+            <a:schemeClr val="accent1"/>
+          </a:lnRef>
+          <a:fillRef idx="0">
+            <a:schemeClr val="accent1"/>
+          </a:fillRef>
+          <a:effectRef idx="1">
+            <a:schemeClr val="accent1"/>
+          </a:effectRef>
+          <a:fontRef idx="minor">
+            <a:schemeClr val="tx1"/>
+          </a:fontRef>
+        </p:style>
+      </p:cxnSp>
+      <p:cxnSp>
+        <p:nvCxnSpPr>
+          <p:cNvPr id="5" name="Straight Arrow Connector 4">
+            <a:extLst>
+              <a:ext uri="{FF2B5EF4-FFF2-40B4-BE49-F238E27FC236}">
+                <a16:creationId xmlns:a16="http://schemas.microsoft.com/office/drawing/2014/main" id="{D53686F5-6B47-6419-AA4E-2616CDB52782}"/>
+              </a:ext>
+            </a:extLst>
+          </p:cNvPr>
+          <p:cNvCxnSpPr>
+            <a:cxnSpLocks/>
+          </p:cNvCxnSpPr>
+          <p:nvPr/>
+        </p:nvCxnSpPr>
+        <p:spPr>
+          <a:xfrm flipH="1">
+            <a:off x="9203635" y="1338470"/>
+            <a:ext cx="964834" cy="0"/>
+          </a:xfrm>
+          <a:prstGeom prst="straightConnector1">
+            <a:avLst/>
+          </a:prstGeom>
+          <a:ln w="44450">
+            <a:solidFill>
+              <a:schemeClr val="tx1"/>
+            </a:solidFill>
+            <a:tailEnd type="triangle" w="lg" len="lg"/>
+          </a:ln>
+        </p:spPr>
+        <p:style>
+          <a:lnRef idx="2">
+            <a:schemeClr val="accent1"/>
+          </a:lnRef>
+          <a:fillRef idx="0">
+            <a:schemeClr val="accent1"/>
+          </a:fillRef>
+          <a:effectRef idx="1">
+            <a:schemeClr val="accent1"/>
+          </a:effectRef>
+          <a:fontRef idx="minor">
+            <a:schemeClr val="tx1"/>
+          </a:fontRef>
+        </p:style>
+      </p:cxnSp>
     </p:spTree>
     <p:extLst>
       <p:ext uri="{BB962C8B-B14F-4D97-AF65-F5344CB8AC3E}">

--- a/documentation/plot_info.pptx
+++ b/documentation/plot_info.pptx
@@ -208,7 +208,7 @@
           <a:p>
             <a:fld id="{6F386B01-FD28-405F-B00F-6A73E9402EB4}" type="datetimeFigureOut">
               <a:rPr lang="en-CA" smtClean="0"/>
-              <a:t>2025-07-14</a:t>
+              <a:t>2025-07-15</a:t>
             </a:fld>
             <a:endParaRPr lang="en-CA"/>
           </a:p>
@@ -1409,7 +1409,7 @@
           <a:p>
             <a:fld id="{1C129C08-9FBA-4F8A-A6CA-6871A16D534D}" type="datetimeFigureOut">
               <a:rPr lang="en-CA" smtClean="0"/>
-              <a:t>2025-07-14</a:t>
+              <a:t>2025-07-15</a:t>
             </a:fld>
             <a:endParaRPr lang="en-CA"/>
           </a:p>
@@ -1609,7 +1609,7 @@
           <a:p>
             <a:fld id="{1C129C08-9FBA-4F8A-A6CA-6871A16D534D}" type="datetimeFigureOut">
               <a:rPr lang="en-CA" smtClean="0"/>
-              <a:t>2025-07-14</a:t>
+              <a:t>2025-07-15</a:t>
             </a:fld>
             <a:endParaRPr lang="en-CA"/>
           </a:p>
@@ -1819,7 +1819,7 @@
           <a:p>
             <a:fld id="{1C129C08-9FBA-4F8A-A6CA-6871A16D534D}" type="datetimeFigureOut">
               <a:rPr lang="en-CA" smtClean="0"/>
-              <a:t>2025-07-14</a:t>
+              <a:t>2025-07-15</a:t>
             </a:fld>
             <a:endParaRPr lang="en-CA"/>
           </a:p>
@@ -2019,7 +2019,7 @@
           <a:p>
             <a:fld id="{1C129C08-9FBA-4F8A-A6CA-6871A16D534D}" type="datetimeFigureOut">
               <a:rPr lang="en-CA" smtClean="0"/>
-              <a:t>2025-07-14</a:t>
+              <a:t>2025-07-15</a:t>
             </a:fld>
             <a:endParaRPr lang="en-CA"/>
           </a:p>
@@ -2295,7 +2295,7 @@
           <a:p>
             <a:fld id="{1C129C08-9FBA-4F8A-A6CA-6871A16D534D}" type="datetimeFigureOut">
               <a:rPr lang="en-CA" smtClean="0"/>
-              <a:t>2025-07-14</a:t>
+              <a:t>2025-07-15</a:t>
             </a:fld>
             <a:endParaRPr lang="en-CA"/>
           </a:p>
@@ -2563,7 +2563,7 @@
           <a:p>
             <a:fld id="{1C129C08-9FBA-4F8A-A6CA-6871A16D534D}" type="datetimeFigureOut">
               <a:rPr lang="en-CA" smtClean="0"/>
-              <a:t>2025-07-14</a:t>
+              <a:t>2025-07-15</a:t>
             </a:fld>
             <a:endParaRPr lang="en-CA"/>
           </a:p>
@@ -2978,7 +2978,7 @@
           <a:p>
             <a:fld id="{1C129C08-9FBA-4F8A-A6CA-6871A16D534D}" type="datetimeFigureOut">
               <a:rPr lang="en-CA" smtClean="0"/>
-              <a:t>2025-07-14</a:t>
+              <a:t>2025-07-15</a:t>
             </a:fld>
             <a:endParaRPr lang="en-CA"/>
           </a:p>
@@ -3120,7 +3120,7 @@
           <a:p>
             <a:fld id="{1C129C08-9FBA-4F8A-A6CA-6871A16D534D}" type="datetimeFigureOut">
               <a:rPr lang="en-CA" smtClean="0"/>
-              <a:t>2025-07-14</a:t>
+              <a:t>2025-07-15</a:t>
             </a:fld>
             <a:endParaRPr lang="en-CA"/>
           </a:p>
@@ -3233,7 +3233,7 @@
           <a:p>
             <a:fld id="{1C129C08-9FBA-4F8A-A6CA-6871A16D534D}" type="datetimeFigureOut">
               <a:rPr lang="en-CA" smtClean="0"/>
-              <a:t>2025-07-14</a:t>
+              <a:t>2025-07-15</a:t>
             </a:fld>
             <a:endParaRPr lang="en-CA"/>
           </a:p>
@@ -3546,7 +3546,7 @@
           <a:p>
             <a:fld id="{1C129C08-9FBA-4F8A-A6CA-6871A16D534D}" type="datetimeFigureOut">
               <a:rPr lang="en-CA" smtClean="0"/>
-              <a:t>2025-07-14</a:t>
+              <a:t>2025-07-15</a:t>
             </a:fld>
             <a:endParaRPr lang="en-CA"/>
           </a:p>
@@ -3835,7 +3835,7 @@
           <a:p>
             <a:fld id="{1C129C08-9FBA-4F8A-A6CA-6871A16D534D}" type="datetimeFigureOut">
               <a:rPr lang="en-CA" smtClean="0"/>
-              <a:t>2025-07-14</a:t>
+              <a:t>2025-07-15</a:t>
             </a:fld>
             <a:endParaRPr lang="en-CA"/>
           </a:p>
@@ -4078,7 +4078,7 @@
           <a:p>
             <a:fld id="{1C129C08-9FBA-4F8A-A6CA-6871A16D534D}" type="datetimeFigureOut">
               <a:rPr lang="en-CA" smtClean="0"/>
-              <a:t>2025-07-14</a:t>
+              <a:t>2025-07-15</a:t>
             </a:fld>
             <a:endParaRPr lang="en-CA"/>
           </a:p>
@@ -4791,7 +4791,7 @@
         </p:nvSpPr>
         <p:spPr>
           <a:xfrm>
-            <a:off x="9214628" y="413545"/>
+            <a:off x="9173941" y="428178"/>
             <a:ext cx="2870200" cy="6001643"/>
           </a:xfrm>
           <a:prstGeom prst="rect">
@@ -4889,15 +4889,7 @@
           <a:p>
             <a:r>
               <a:rPr lang="en-CA" sz="1200" dirty="0"/>
-              <a:t>Generalized range (min to max) of year-to-year variability the GCM ensemble </a:t>
-            </a:r>
-            <a:r>
-              <a:rPr lang="en-CA" sz="1200" dirty="0" err="1"/>
-              <a:t>ensemble</a:t>
-            </a:r>
-            <a:r>
-              <a:rPr lang="en-CA" sz="1200" dirty="0"/>
-              <a:t> for each SSP emissions scenario (</a:t>
+              <a:t>Generalized range (min to max) of year-to-year variability the GCM ensemble for each SSP emissions scenario (</a:t>
             </a:r>
             <a:r>
               <a:rPr lang="en-CA" sz="1200" b="1" dirty="0">
@@ -5071,7 +5063,7 @@
         </p:blipFill>
         <p:spPr>
           <a:xfrm>
-            <a:off x="8816696" y="743825"/>
+            <a:off x="8816695" y="761950"/>
             <a:ext cx="397933" cy="397933"/>
           </a:xfrm>
           <a:prstGeom prst="rect">
@@ -5107,7 +5099,7 @@
         </p:blipFill>
         <p:spPr>
           <a:xfrm>
-            <a:off x="8816695" y="1330599"/>
+            <a:off x="8835587" y="1358877"/>
             <a:ext cx="397933" cy="397933"/>
           </a:xfrm>
           <a:prstGeom prst="rect">
@@ -5143,7 +5135,7 @@
         </p:blipFill>
         <p:spPr>
           <a:xfrm>
-            <a:off x="8816695" y="2062545"/>
+            <a:off x="8816695" y="2066274"/>
             <a:ext cx="397933" cy="397933"/>
           </a:xfrm>
           <a:prstGeom prst="rect">
@@ -5179,7 +5171,7 @@
         </p:blipFill>
         <p:spPr>
           <a:xfrm>
-            <a:off x="8816695" y="3102600"/>
+            <a:off x="8835587" y="3171659"/>
             <a:ext cx="397933" cy="397933"/>
           </a:xfrm>
           <a:prstGeom prst="rect">
@@ -5215,7 +5207,7 @@
         </p:blipFill>
         <p:spPr>
           <a:xfrm>
-            <a:off x="8824167" y="4200815"/>
+            <a:off x="8838467" y="4280774"/>
             <a:ext cx="397933" cy="397933"/>
           </a:xfrm>
           <a:prstGeom prst="rect">
@@ -5251,7 +5243,7 @@
         </p:blipFill>
         <p:spPr>
           <a:xfrm>
-            <a:off x="8838467" y="4936392"/>
+            <a:off x="8838467" y="5000210"/>
             <a:ext cx="369332" cy="369332"/>
           </a:xfrm>
           <a:prstGeom prst="rect">
@@ -5359,7 +5351,7 @@
         </p:blipFill>
         <p:spPr>
           <a:xfrm>
-            <a:off x="8830995" y="5643970"/>
+            <a:off x="8840843" y="5691045"/>
             <a:ext cx="369332" cy="369332"/>
           </a:xfrm>
           <a:prstGeom prst="rect">
@@ -5887,7 +5879,7 @@
         </p:blipFill>
         <p:spPr>
           <a:xfrm>
-            <a:off x="8248649" y="1485170"/>
+            <a:off x="8266642" y="1522643"/>
             <a:ext cx="397933" cy="397933"/>
           </a:xfrm>
           <a:prstGeom prst="rect">
@@ -5923,7 +5915,7 @@
         </p:blipFill>
         <p:spPr>
           <a:xfrm>
-            <a:off x="8248649" y="2556699"/>
+            <a:off x="8243875" y="2592926"/>
             <a:ext cx="397933" cy="397933"/>
           </a:xfrm>
           <a:prstGeom prst="rect">
@@ -6251,7 +6243,7 @@
         </p:blipFill>
         <p:spPr>
           <a:xfrm>
-            <a:off x="8248649" y="3486779"/>
+            <a:off x="8245476" y="3540895"/>
             <a:ext cx="369332" cy="369332"/>
           </a:xfrm>
           <a:prstGeom prst="rect">
@@ -6287,7 +6279,7 @@
         </p:blipFill>
         <p:spPr>
           <a:xfrm>
-            <a:off x="8245476" y="4227667"/>
+            <a:off x="8245476" y="4269314"/>
             <a:ext cx="369332" cy="369332"/>
           </a:xfrm>
           <a:prstGeom prst="rect">
@@ -6403,7 +6395,7 @@
         </p:blipFill>
         <p:spPr>
           <a:xfrm>
-            <a:off x="8245773" y="5147035"/>
+            <a:off x="8266642" y="5150691"/>
             <a:ext cx="369332" cy="369332"/>
           </a:xfrm>
           <a:prstGeom prst="rect">
@@ -7002,7 +6994,7 @@
         </p:blipFill>
         <p:spPr>
           <a:xfrm>
-            <a:off x="9333469" y="1622946"/>
+            <a:off x="9331868" y="1573703"/>
             <a:ext cx="369331" cy="369331"/>
           </a:xfrm>
           <a:prstGeom prst="rect">
@@ -7038,7 +7030,7 @@
         </p:blipFill>
         <p:spPr>
           <a:xfrm>
-            <a:off x="9331867" y="2008705"/>
+            <a:off x="9331068" y="2055945"/>
             <a:ext cx="372533" cy="372533"/>
           </a:xfrm>
           <a:prstGeom prst="rect">

--- a/documentation/plot_info.pptx
+++ b/documentation/plot_info.pptx
@@ -769,9 +769,9 @@
             </a:r>
           </a:p>
           <a:p>
-            <a:pPr marL="0" indent="0">
+            <a:pPr marL="171450" indent="-171450">
               <a:buFontTx/>
-              <a:buNone/>
+              <a:buChar char="-"/>
             </a:pPr>
             <a:r>
               <a:rPr lang="en-US" sz="1200" b="0" i="0" kern="1200" dirty="0">
@@ -783,24 +783,14 @@
                 <a:ea typeface="+mn-ea"/>
                 <a:cs typeface="+mn-cs"/>
               </a:rPr>
-              <a:t>- Compare simulated climate change to observed climate change in the 2001-2020 period. </a:t>
-            </a:r>
-          </a:p>
-          <a:p>
-            <a:r>
-              <a:rPr lang="en-US" sz="1200" b="0" i="0" kern="1200" dirty="0">
-                <a:solidFill>
-                  <a:schemeClr val="tx1"/>
-                </a:solidFill>
-                <a:effectLst/>
-                <a:latin typeface="+mn-lt"/>
-                <a:ea typeface="+mn-ea"/>
-                <a:cs typeface="+mn-cs"/>
-              </a:rPr>
-              <a:t>All climate changes are relative to the 1961-1990 reference period normals.</a:t>
-            </a:r>
-          </a:p>
-          <a:p>
+              <a:t>Compare simulated climate change to observed climate change in the 2001-2020 period. </a:t>
+            </a:r>
+          </a:p>
+          <a:p>
+            <a:pPr marL="171450" indent="-171450">
+              <a:buFontTx/>
+              <a:buChar char="-"/>
+            </a:pPr>
             <a:endParaRPr lang="en-US" sz="1200" b="0" i="0" kern="1200" dirty="0">
               <a:solidFill>
                 <a:schemeClr val="tx1"/>
@@ -1220,6 +1210,14 @@
           <a:bodyPr/>
           <a:lstStyle/>
           <a:p>
+            <a:r>
+              <a:rPr lang="en-US" dirty="0"/>
+              <a:t>How to interpret </a:t>
+            </a:r>
+            <a:r>
+              <a:rPr lang="en-US"/>
+              <a:t>climatic trends:</a:t>
+            </a:r>
             <a:endParaRPr lang="en-US" dirty="0"/>
           </a:p>
         </p:txBody>

--- a/documentation/plot_info.pptx
+++ b/documentation/plot_info.pptx
@@ -7304,7 +7304,7 @@
         </p:blipFill>
         <p:spPr>
           <a:xfrm>
-            <a:off x="1920876" y="484283"/>
+            <a:off x="574168" y="641773"/>
             <a:ext cx="8147050" cy="5889434"/>
           </a:xfrm>
           <a:prstGeom prst="rect">
@@ -7326,7 +7326,7 @@
         </p:nvSpPr>
         <p:spPr>
           <a:xfrm>
-            <a:off x="2438401" y="115124"/>
+            <a:off x="1091693" y="272441"/>
             <a:ext cx="7112000" cy="369332"/>
           </a:xfrm>
           <a:prstGeom prst="rect">
@@ -7362,7 +7362,7 @@
         </p:nvSpPr>
         <p:spPr>
           <a:xfrm>
-            <a:off x="186267" y="2294467"/>
+            <a:off x="9636587" y="4074507"/>
             <a:ext cx="1836208" cy="923330"/>
           </a:xfrm>
           <a:prstGeom prst="rect">
@@ -7432,7 +7432,7 @@
         </p:nvSpPr>
         <p:spPr>
           <a:xfrm>
-            <a:off x="10168469" y="1064654"/>
+            <a:off x="8811617" y="1192473"/>
             <a:ext cx="1649941" cy="923330"/>
           </a:xfrm>
           <a:prstGeom prst="rect">
@@ -7490,7 +7490,7 @@
         </p:nvSpPr>
         <p:spPr>
           <a:xfrm>
-            <a:off x="5918201" y="2852802"/>
+            <a:off x="4647693" y="2967335"/>
             <a:ext cx="1523999" cy="923330"/>
           </a:xfrm>
           <a:prstGeom prst="rect">
@@ -7548,48 +7548,6 @@
       </p:sp>
       <p:cxnSp>
         <p:nvCxnSpPr>
-          <p:cNvPr id="3" name="Straight Arrow Connector 2">
-            <a:extLst>
-              <a:ext uri="{FF2B5EF4-FFF2-40B4-BE49-F238E27FC236}">
-                <a16:creationId xmlns:a16="http://schemas.microsoft.com/office/drawing/2014/main" id="{76A3993D-EB61-D6D5-8A03-8A5C788C956E}"/>
-              </a:ext>
-            </a:extLst>
-          </p:cNvPr>
-          <p:cNvCxnSpPr/>
-          <p:nvPr/>
-        </p:nvCxnSpPr>
-        <p:spPr>
-          <a:xfrm>
-            <a:off x="1920876" y="2494722"/>
-            <a:ext cx="3187837" cy="0"/>
-          </a:xfrm>
-          <a:prstGeom prst="straightConnector1">
-            <a:avLst/>
-          </a:prstGeom>
-          <a:ln w="44450">
-            <a:solidFill>
-              <a:schemeClr val="tx1"/>
-            </a:solidFill>
-            <a:tailEnd type="triangle" w="lg" len="lg"/>
-          </a:ln>
-        </p:spPr>
-        <p:style>
-          <a:lnRef idx="2">
-            <a:schemeClr val="accent1"/>
-          </a:lnRef>
-          <a:fillRef idx="0">
-            <a:schemeClr val="accent1"/>
-          </a:fillRef>
-          <a:effectRef idx="1">
-            <a:schemeClr val="accent1"/>
-          </a:effectRef>
-          <a:fontRef idx="minor">
-            <a:schemeClr val="tx1"/>
-          </a:fontRef>
-        </p:style>
-      </p:cxnSp>
-      <p:cxnSp>
-        <p:nvCxnSpPr>
           <p:cNvPr id="4" name="Straight Arrow Connector 3">
             <a:extLst>
               <a:ext uri="{FF2B5EF4-FFF2-40B4-BE49-F238E27FC236}">
@@ -7604,7 +7562,7 @@
         </p:nvCxnSpPr>
         <p:spPr>
           <a:xfrm>
-            <a:off x="6579704" y="3776132"/>
+            <a:off x="5193356" y="3946687"/>
             <a:ext cx="0" cy="865442"/>
           </a:xfrm>
           <a:prstGeom prst="straightConnector1">
@@ -7648,8 +7606,52 @@
         </p:nvCxnSpPr>
         <p:spPr>
           <a:xfrm flipH="1">
-            <a:off x="9203635" y="1338470"/>
+            <a:off x="7846783" y="1456457"/>
             <a:ext cx="964834" cy="0"/>
+          </a:xfrm>
+          <a:prstGeom prst="straightConnector1">
+            <a:avLst/>
+          </a:prstGeom>
+          <a:ln w="44450">
+            <a:solidFill>
+              <a:schemeClr val="tx1"/>
+            </a:solidFill>
+            <a:tailEnd type="triangle" w="lg" len="lg"/>
+          </a:ln>
+        </p:spPr>
+        <p:style>
+          <a:lnRef idx="2">
+            <a:schemeClr val="accent1"/>
+          </a:lnRef>
+          <a:fillRef idx="0">
+            <a:schemeClr val="accent1"/>
+          </a:fillRef>
+          <a:effectRef idx="1">
+            <a:schemeClr val="accent1"/>
+          </a:effectRef>
+          <a:fontRef idx="minor">
+            <a:schemeClr val="tx1"/>
+          </a:fontRef>
+        </p:style>
+      </p:cxnSp>
+      <p:cxnSp>
+        <p:nvCxnSpPr>
+          <p:cNvPr id="2" name="Straight Arrow Connector 1">
+            <a:extLst>
+              <a:ext uri="{FF2B5EF4-FFF2-40B4-BE49-F238E27FC236}">
+                <a16:creationId xmlns:a16="http://schemas.microsoft.com/office/drawing/2014/main" id="{EC5CB9AB-AA26-A709-0CF1-74AD34840045}"/>
+              </a:ext>
+            </a:extLst>
+          </p:cNvPr>
+          <p:cNvCxnSpPr>
+            <a:cxnSpLocks/>
+          </p:cNvCxnSpPr>
+          <p:nvPr/>
+        </p:nvCxnSpPr>
+        <p:spPr>
+          <a:xfrm flipH="1">
+            <a:off x="7086739" y="4375774"/>
+            <a:ext cx="2549848" cy="0"/>
           </a:xfrm>
           <a:prstGeom prst="straightConnector1">
             <a:avLst/>
